--- a/docs/pptx/auc3/ritu-auc3-linsubhr-dosedisc-grade3.pptx
+++ b/docs/pptx/auc3/ritu-auc3-linsubhr-dosedisc-grade3.pptx
@@ -2443,7 +2443,7 @@
           </p:nvSpPr>
           <p:spPr>
             <a:xfrm>
-              <a:off x="980186" y="1896563"/>
+              <a:off x="980739" y="1896563"/>
               <a:ext cx="0" cy="3826579"/>
             </a:xfrm>
             <a:custGeom>
@@ -2486,7 +2486,7 @@
           </p:nvSpPr>
           <p:spPr>
             <a:xfrm>
-              <a:off x="3262630" y="1896563"/>
+              <a:off x="3260798" y="1896563"/>
               <a:ext cx="0" cy="3826579"/>
             </a:xfrm>
             <a:custGeom>
@@ -2529,7 +2529,7 @@
           </p:nvSpPr>
           <p:spPr>
             <a:xfrm>
-              <a:off x="5545073" y="1896563"/>
+              <a:off x="5540858" y="1896563"/>
               <a:ext cx="0" cy="3826579"/>
             </a:xfrm>
             <a:custGeom>
@@ -2572,7 +2572,7 @@
           </p:nvSpPr>
           <p:spPr>
             <a:xfrm>
-              <a:off x="7827517" y="1896563"/>
+              <a:off x="7820918" y="1896563"/>
               <a:ext cx="0" cy="3826579"/>
             </a:xfrm>
             <a:custGeom>
@@ -2830,7 +2830,7 @@
           </p:nvSpPr>
           <p:spPr>
             <a:xfrm>
-              <a:off x="2121408" y="1896563"/>
+              <a:off x="2120768" y="1896563"/>
               <a:ext cx="0" cy="3826579"/>
             </a:xfrm>
             <a:custGeom>
@@ -2873,7 +2873,7 @@
           </p:nvSpPr>
           <p:spPr>
             <a:xfrm>
-              <a:off x="4403852" y="1896563"/>
+              <a:off x="4400828" y="1896563"/>
               <a:ext cx="0" cy="3826579"/>
             </a:xfrm>
             <a:custGeom>
@@ -2916,7 +2916,7 @@
           </p:nvSpPr>
           <p:spPr>
             <a:xfrm>
-              <a:off x="6686295" y="1896563"/>
+              <a:off x="6680888" y="1896563"/>
               <a:ext cx="0" cy="3826579"/>
             </a:xfrm>
             <a:custGeom>
@@ -2960,521 +2960,521 @@
           <p:spPr>
             <a:xfrm>
               <a:off x="1172049" y="1896563"/>
-              <a:ext cx="7090630" cy="3599071"/>
+              <a:ext cx="7090630" cy="3597943"/>
             </a:xfrm>
             <a:custGeom>
               <a:avLst/>
               <a:pathLst>
-                <a:path w="7090630" h="3599071">
+                <a:path w="7090630" h="3597943">
                   <a:moveTo>
-                    <a:pt x="0" y="2544861"/>
+                    <a:pt x="0" y="2533257"/>
                   </a:moveTo>
                   <a:lnTo>
-                    <a:pt x="71622" y="2550840"/>
-                  </a:lnTo>
-                  <a:lnTo>
-                    <a:pt x="143245" y="2556787"/>
-                  </a:lnTo>
-                  <a:lnTo>
-                    <a:pt x="214867" y="2562702"/>
-                  </a:lnTo>
-                  <a:lnTo>
-                    <a:pt x="286490" y="2568585"/>
-                  </a:lnTo>
-                  <a:lnTo>
-                    <a:pt x="358112" y="2574436"/>
-                  </a:lnTo>
-                  <a:lnTo>
-                    <a:pt x="429735" y="2580255"/>
-                  </a:lnTo>
-                  <a:lnTo>
-                    <a:pt x="501357" y="2586044"/>
-                  </a:lnTo>
-                  <a:lnTo>
-                    <a:pt x="572980" y="2591801"/>
-                  </a:lnTo>
-                  <a:lnTo>
-                    <a:pt x="644602" y="2597526"/>
-                  </a:lnTo>
-                  <a:lnTo>
-                    <a:pt x="716225" y="2603221"/>
-                  </a:lnTo>
-                  <a:lnTo>
-                    <a:pt x="787847" y="2608886"/>
-                  </a:lnTo>
-                  <a:lnTo>
-                    <a:pt x="859470" y="2614519"/>
-                  </a:lnTo>
-                  <a:lnTo>
-                    <a:pt x="931092" y="2620123"/>
-                  </a:lnTo>
-                  <a:lnTo>
-                    <a:pt x="1002715" y="2625696"/>
-                  </a:lnTo>
-                  <a:lnTo>
-                    <a:pt x="1074337" y="2631239"/>
-                  </a:lnTo>
-                  <a:lnTo>
-                    <a:pt x="1145960" y="2636752"/>
-                  </a:lnTo>
-                  <a:lnTo>
-                    <a:pt x="1217582" y="2642235"/>
-                  </a:lnTo>
-                  <a:lnTo>
-                    <a:pt x="1289205" y="2647689"/>
-                  </a:lnTo>
-                  <a:lnTo>
-                    <a:pt x="1360827" y="2653113"/>
-                  </a:lnTo>
-                  <a:lnTo>
-                    <a:pt x="1432450" y="2658508"/>
-                  </a:lnTo>
-                  <a:lnTo>
-                    <a:pt x="1504073" y="2663874"/>
-                  </a:lnTo>
-                  <a:lnTo>
-                    <a:pt x="1575695" y="2669210"/>
-                  </a:lnTo>
-                  <a:lnTo>
-                    <a:pt x="1647318" y="2674519"/>
-                  </a:lnTo>
-                  <a:lnTo>
-                    <a:pt x="1718940" y="2679798"/>
-                  </a:lnTo>
-                  <a:lnTo>
-                    <a:pt x="1790563" y="2685049"/>
-                  </a:lnTo>
-                  <a:lnTo>
-                    <a:pt x="1862185" y="2690271"/>
-                  </a:lnTo>
-                  <a:lnTo>
-                    <a:pt x="1933808" y="2695466"/>
-                  </a:lnTo>
-                  <a:lnTo>
-                    <a:pt x="2005430" y="2700632"/>
-                  </a:lnTo>
-                  <a:lnTo>
-                    <a:pt x="2077053" y="2705771"/>
-                  </a:lnTo>
-                  <a:lnTo>
-                    <a:pt x="2148675" y="2710881"/>
-                  </a:lnTo>
-                  <a:lnTo>
-                    <a:pt x="2220298" y="2715965"/>
-                  </a:lnTo>
-                  <a:lnTo>
-                    <a:pt x="2291920" y="2721020"/>
-                  </a:lnTo>
-                  <a:lnTo>
-                    <a:pt x="2363543" y="2726049"/>
-                  </a:lnTo>
-                  <a:lnTo>
-                    <a:pt x="2435165" y="2731050"/>
-                  </a:lnTo>
-                  <a:lnTo>
-                    <a:pt x="2506788" y="2736024"/>
-                  </a:lnTo>
-                  <a:lnTo>
-                    <a:pt x="2578410" y="2740972"/>
-                  </a:lnTo>
-                  <a:lnTo>
-                    <a:pt x="2650033" y="2745892"/>
-                  </a:lnTo>
-                  <a:lnTo>
-                    <a:pt x="2721655" y="2750787"/>
-                  </a:lnTo>
-                  <a:lnTo>
-                    <a:pt x="2793278" y="2755654"/>
-                  </a:lnTo>
-                  <a:lnTo>
-                    <a:pt x="2864901" y="2760496"/>
-                  </a:lnTo>
-                  <a:lnTo>
-                    <a:pt x="2936523" y="2765311"/>
-                  </a:lnTo>
-                  <a:lnTo>
-                    <a:pt x="3008146" y="2770101"/>
-                  </a:lnTo>
-                  <a:lnTo>
-                    <a:pt x="3079768" y="2774864"/>
-                  </a:lnTo>
-                  <a:lnTo>
-                    <a:pt x="3151391" y="2779602"/>
-                  </a:lnTo>
-                  <a:lnTo>
-                    <a:pt x="3223013" y="2767291"/>
-                  </a:lnTo>
-                  <a:lnTo>
-                    <a:pt x="3294636" y="2710348"/>
-                  </a:lnTo>
-                  <a:lnTo>
-                    <a:pt x="3366258" y="2649744"/>
-                  </a:lnTo>
-                  <a:lnTo>
-                    <a:pt x="3437881" y="2585241"/>
-                  </a:lnTo>
-                  <a:lnTo>
-                    <a:pt x="3509503" y="2516590"/>
-                  </a:lnTo>
-                  <a:lnTo>
-                    <a:pt x="3581126" y="2443524"/>
-                  </a:lnTo>
-                  <a:lnTo>
-                    <a:pt x="3652748" y="2365758"/>
-                  </a:lnTo>
-                  <a:lnTo>
-                    <a:pt x="3724371" y="2282991"/>
-                  </a:lnTo>
-                  <a:lnTo>
-                    <a:pt x="3795993" y="2194900"/>
-                  </a:lnTo>
-                  <a:lnTo>
-                    <a:pt x="3867616" y="2101144"/>
-                  </a:lnTo>
-                  <a:lnTo>
-                    <a:pt x="3939238" y="2001358"/>
-                  </a:lnTo>
-                  <a:lnTo>
-                    <a:pt x="4010861" y="1895154"/>
-                  </a:lnTo>
-                  <a:lnTo>
-                    <a:pt x="4082483" y="1782119"/>
-                  </a:lnTo>
-                  <a:lnTo>
-                    <a:pt x="4154106" y="1661815"/>
-                  </a:lnTo>
-                  <a:lnTo>
-                    <a:pt x="4225729" y="1533773"/>
-                  </a:lnTo>
-                  <a:lnTo>
-                    <a:pt x="4297351" y="1397495"/>
-                  </a:lnTo>
-                  <a:lnTo>
-                    <a:pt x="4368974" y="1252453"/>
-                  </a:lnTo>
-                  <a:lnTo>
-                    <a:pt x="4440596" y="1098083"/>
-                  </a:lnTo>
-                  <a:lnTo>
-                    <a:pt x="4512219" y="933784"/>
-                  </a:lnTo>
-                  <a:lnTo>
-                    <a:pt x="4583841" y="758918"/>
-                  </a:lnTo>
-                  <a:lnTo>
-                    <a:pt x="4655464" y="572805"/>
-                  </a:lnTo>
-                  <a:lnTo>
-                    <a:pt x="4727086" y="374722"/>
-                  </a:lnTo>
-                  <a:lnTo>
-                    <a:pt x="4798709" y="163899"/>
-                  </a:lnTo>
-                  <a:lnTo>
-                    <a:pt x="4851025" y="0"/>
+                    <a:pt x="71622" y="2539639"/>
+                  </a:lnTo>
+                  <a:lnTo>
+                    <a:pt x="143245" y="2545985"/>
+                  </a:lnTo>
+                  <a:lnTo>
+                    <a:pt x="214867" y="2552294"/>
+                  </a:lnTo>
+                  <a:lnTo>
+                    <a:pt x="286490" y="2558567"/>
+                  </a:lnTo>
+                  <a:lnTo>
+                    <a:pt x="358112" y="2564804"/>
+                  </a:lnTo>
+                  <a:lnTo>
+                    <a:pt x="429735" y="2571006"/>
+                  </a:lnTo>
+                  <a:lnTo>
+                    <a:pt x="501357" y="2577173"/>
+                  </a:lnTo>
+                  <a:lnTo>
+                    <a:pt x="572980" y="2583304"/>
+                  </a:lnTo>
+                  <a:lnTo>
+                    <a:pt x="644602" y="2589400"/>
+                  </a:lnTo>
+                  <a:lnTo>
+                    <a:pt x="716225" y="2595462"/>
+                  </a:lnTo>
+                  <a:lnTo>
+                    <a:pt x="787847" y="2601489"/>
+                  </a:lnTo>
+                  <a:lnTo>
+                    <a:pt x="859470" y="2607482"/>
+                  </a:lnTo>
+                  <a:lnTo>
+                    <a:pt x="931092" y="2613441"/>
+                  </a:lnTo>
+                  <a:lnTo>
+                    <a:pt x="1002715" y="2619365"/>
+                  </a:lnTo>
+                  <a:lnTo>
+                    <a:pt x="1074337" y="2625256"/>
+                  </a:lnTo>
+                  <a:lnTo>
+                    <a:pt x="1145960" y="2631113"/>
+                  </a:lnTo>
+                  <a:lnTo>
+                    <a:pt x="1217582" y="2636937"/>
+                  </a:lnTo>
+                  <a:lnTo>
+                    <a:pt x="1289205" y="2642728"/>
+                  </a:lnTo>
+                  <a:lnTo>
+                    <a:pt x="1360827" y="2648485"/>
+                  </a:lnTo>
+                  <a:lnTo>
+                    <a:pt x="1432450" y="2654210"/>
+                  </a:lnTo>
+                  <a:lnTo>
+                    <a:pt x="1504073" y="2659902"/>
+                  </a:lnTo>
+                  <a:lnTo>
+                    <a:pt x="1575695" y="2665562"/>
+                  </a:lnTo>
+                  <a:lnTo>
+                    <a:pt x="1647318" y="2671189"/>
+                  </a:lnTo>
+                  <a:lnTo>
+                    <a:pt x="1718940" y="2676785"/>
+                  </a:lnTo>
+                  <a:lnTo>
+                    <a:pt x="1790563" y="2682348"/>
+                  </a:lnTo>
+                  <a:lnTo>
+                    <a:pt x="1862185" y="2687880"/>
+                  </a:lnTo>
+                  <a:lnTo>
+                    <a:pt x="1933808" y="2693380"/>
+                  </a:lnTo>
+                  <a:lnTo>
+                    <a:pt x="2005430" y="2698849"/>
+                  </a:lnTo>
+                  <a:lnTo>
+                    <a:pt x="2077053" y="2704287"/>
+                  </a:lnTo>
+                  <a:lnTo>
+                    <a:pt x="2148675" y="2709693"/>
+                  </a:lnTo>
+                  <a:lnTo>
+                    <a:pt x="2220298" y="2715069"/>
+                  </a:lnTo>
+                  <a:lnTo>
+                    <a:pt x="2291920" y="2720414"/>
+                  </a:lnTo>
+                  <a:lnTo>
+                    <a:pt x="2363543" y="2725729"/>
+                  </a:lnTo>
+                  <a:lnTo>
+                    <a:pt x="2435165" y="2731014"/>
+                  </a:lnTo>
+                  <a:lnTo>
+                    <a:pt x="2506788" y="2736268"/>
+                  </a:lnTo>
+                  <a:lnTo>
+                    <a:pt x="2578410" y="2741492"/>
+                  </a:lnTo>
+                  <a:lnTo>
+                    <a:pt x="2650033" y="2746687"/>
+                  </a:lnTo>
+                  <a:lnTo>
+                    <a:pt x="2721655" y="2751852"/>
+                  </a:lnTo>
+                  <a:lnTo>
+                    <a:pt x="2793278" y="2756987"/>
+                  </a:lnTo>
+                  <a:lnTo>
+                    <a:pt x="2864901" y="2762093"/>
+                  </a:lnTo>
+                  <a:lnTo>
+                    <a:pt x="2936523" y="2767171"/>
+                  </a:lnTo>
+                  <a:lnTo>
+                    <a:pt x="3008146" y="2772219"/>
+                  </a:lnTo>
+                  <a:lnTo>
+                    <a:pt x="3079768" y="2777238"/>
+                  </a:lnTo>
+                  <a:lnTo>
+                    <a:pt x="3151391" y="2782229"/>
+                  </a:lnTo>
+                  <a:lnTo>
+                    <a:pt x="3223013" y="2735290"/>
+                  </a:lnTo>
+                  <a:lnTo>
+                    <a:pt x="3294636" y="2675971"/>
+                  </a:lnTo>
+                  <a:lnTo>
+                    <a:pt x="3366258" y="2612816"/>
+                  </a:lnTo>
+                  <a:lnTo>
+                    <a:pt x="3437881" y="2545578"/>
+                  </a:lnTo>
+                  <a:lnTo>
+                    <a:pt x="3509503" y="2473992"/>
+                  </a:lnTo>
+                  <a:lnTo>
+                    <a:pt x="3581126" y="2397776"/>
+                  </a:lnTo>
+                  <a:lnTo>
+                    <a:pt x="3652748" y="2316633"/>
+                  </a:lnTo>
+                  <a:lnTo>
+                    <a:pt x="3724371" y="2230242"/>
+                  </a:lnTo>
+                  <a:lnTo>
+                    <a:pt x="3795993" y="2138265"/>
+                  </a:lnTo>
+                  <a:lnTo>
+                    <a:pt x="3867616" y="2040341"/>
+                  </a:lnTo>
+                  <a:lnTo>
+                    <a:pt x="3939238" y="1936085"/>
+                  </a:lnTo>
+                  <a:lnTo>
+                    <a:pt x="4010861" y="1825087"/>
+                  </a:lnTo>
+                  <a:lnTo>
+                    <a:pt x="4082483" y="1706911"/>
+                  </a:lnTo>
+                  <a:lnTo>
+                    <a:pt x="4154106" y="1581094"/>
+                  </a:lnTo>
+                  <a:lnTo>
+                    <a:pt x="4225729" y="1447141"/>
+                  </a:lnTo>
+                  <a:lnTo>
+                    <a:pt x="4297351" y="1304526"/>
+                  </a:lnTo>
+                  <a:lnTo>
+                    <a:pt x="4368974" y="1152690"/>
+                  </a:lnTo>
+                  <a:lnTo>
+                    <a:pt x="4440596" y="991035"/>
+                  </a:lnTo>
+                  <a:lnTo>
+                    <a:pt x="4512219" y="818927"/>
+                  </a:lnTo>
+                  <a:lnTo>
+                    <a:pt x="4583841" y="635690"/>
+                  </a:lnTo>
+                  <a:lnTo>
+                    <a:pt x="4655464" y="440605"/>
+                  </a:lnTo>
+                  <a:lnTo>
+                    <a:pt x="4727086" y="232904"/>
+                  </a:lnTo>
+                  <a:lnTo>
+                    <a:pt x="4798709" y="11774"/>
+                  </a:lnTo>
+                  <a:lnTo>
+                    <a:pt x="4802291" y="0"/>
                   </a:lnTo>
                   <a:lnTo>
                     <a:pt x="7090630" y="0"/>
                   </a:lnTo>
                   <a:lnTo>
-                    <a:pt x="7090630" y="3004367"/>
-                  </a:lnTo>
-                  <a:lnTo>
-                    <a:pt x="7019007" y="3000849"/>
-                  </a:lnTo>
-                  <a:lnTo>
-                    <a:pt x="6947385" y="2997312"/>
-                  </a:lnTo>
-                  <a:lnTo>
-                    <a:pt x="6875762" y="2993755"/>
-                  </a:lnTo>
-                  <a:lnTo>
-                    <a:pt x="6804139" y="2990180"/>
-                  </a:lnTo>
-                  <a:lnTo>
-                    <a:pt x="6732517" y="2986585"/>
-                  </a:lnTo>
-                  <a:lnTo>
-                    <a:pt x="6660894" y="2982970"/>
-                  </a:lnTo>
-                  <a:lnTo>
-                    <a:pt x="6589272" y="2979336"/>
-                  </a:lnTo>
-                  <a:lnTo>
-                    <a:pt x="6517649" y="2975682"/>
-                  </a:lnTo>
-                  <a:lnTo>
-                    <a:pt x="6446027" y="2972008"/>
-                  </a:lnTo>
-                  <a:lnTo>
-                    <a:pt x="6374404" y="2968315"/>
-                  </a:lnTo>
-                  <a:lnTo>
-                    <a:pt x="6302782" y="2964601"/>
-                  </a:lnTo>
-                  <a:lnTo>
-                    <a:pt x="6231159" y="2960867"/>
-                  </a:lnTo>
-                  <a:lnTo>
-                    <a:pt x="6159537" y="2957113"/>
-                  </a:lnTo>
-                  <a:lnTo>
-                    <a:pt x="6087914" y="2953339"/>
-                  </a:lnTo>
-                  <a:lnTo>
-                    <a:pt x="6016292" y="2949544"/>
-                  </a:lnTo>
-                  <a:lnTo>
-                    <a:pt x="5944669" y="2945728"/>
-                  </a:lnTo>
-                  <a:lnTo>
-                    <a:pt x="5873047" y="2941892"/>
-                  </a:lnTo>
-                  <a:lnTo>
-                    <a:pt x="5801424" y="2938035"/>
-                  </a:lnTo>
-                  <a:lnTo>
-                    <a:pt x="5729802" y="2934157"/>
-                  </a:lnTo>
-                  <a:lnTo>
-                    <a:pt x="5658179" y="2930258"/>
-                  </a:lnTo>
-                  <a:lnTo>
-                    <a:pt x="5586557" y="2926337"/>
-                  </a:lnTo>
-                  <a:lnTo>
-                    <a:pt x="5514934" y="2922396"/>
-                  </a:lnTo>
-                  <a:lnTo>
-                    <a:pt x="5443311" y="2918433"/>
-                  </a:lnTo>
-                  <a:lnTo>
-                    <a:pt x="5371689" y="2914449"/>
-                  </a:lnTo>
-                  <a:lnTo>
-                    <a:pt x="5300066" y="2910443"/>
-                  </a:lnTo>
-                  <a:lnTo>
-                    <a:pt x="5228444" y="2906415"/>
-                  </a:lnTo>
-                  <a:lnTo>
-                    <a:pt x="5156821" y="2902365"/>
-                  </a:lnTo>
-                  <a:lnTo>
-                    <a:pt x="5085199" y="2898294"/>
-                  </a:lnTo>
-                  <a:lnTo>
-                    <a:pt x="5013576" y="2894200"/>
-                  </a:lnTo>
-                  <a:lnTo>
-                    <a:pt x="4941954" y="2890084"/>
-                  </a:lnTo>
-                  <a:lnTo>
-                    <a:pt x="4870331" y="2885946"/>
-                  </a:lnTo>
-                  <a:lnTo>
-                    <a:pt x="4798709" y="2881785"/>
-                  </a:lnTo>
-                  <a:lnTo>
-                    <a:pt x="4727086" y="2877602"/>
-                  </a:lnTo>
-                  <a:lnTo>
-                    <a:pt x="4655464" y="2873396"/>
-                  </a:lnTo>
-                  <a:lnTo>
-                    <a:pt x="4583841" y="2869167"/>
-                  </a:lnTo>
-                  <a:lnTo>
-                    <a:pt x="4512219" y="2864915"/>
-                  </a:lnTo>
-                  <a:lnTo>
-                    <a:pt x="4440596" y="2860640"/>
-                  </a:lnTo>
-                  <a:lnTo>
-                    <a:pt x="4368974" y="2856342"/>
-                  </a:lnTo>
-                  <a:lnTo>
-                    <a:pt x="4297351" y="2852021"/>
-                  </a:lnTo>
-                  <a:lnTo>
-                    <a:pt x="4225729" y="2847676"/>
-                  </a:lnTo>
-                  <a:lnTo>
-                    <a:pt x="4154106" y="2843308"/>
-                  </a:lnTo>
-                  <a:lnTo>
-                    <a:pt x="4082483" y="2838916"/>
-                  </a:lnTo>
-                  <a:lnTo>
-                    <a:pt x="4010861" y="2834500"/>
-                  </a:lnTo>
-                  <a:lnTo>
-                    <a:pt x="3939238" y="2830060"/>
-                  </a:lnTo>
-                  <a:lnTo>
-                    <a:pt x="3867616" y="2825596"/>
-                  </a:lnTo>
-                  <a:lnTo>
-                    <a:pt x="3795993" y="2821108"/>
-                  </a:lnTo>
-                  <a:lnTo>
-                    <a:pt x="3724371" y="2816595"/>
-                  </a:lnTo>
-                  <a:lnTo>
-                    <a:pt x="3652748" y="2812058"/>
-                  </a:lnTo>
-                  <a:lnTo>
-                    <a:pt x="3581126" y="2807496"/>
-                  </a:lnTo>
-                  <a:lnTo>
-                    <a:pt x="3509503" y="2802910"/>
-                  </a:lnTo>
-                  <a:lnTo>
-                    <a:pt x="3437881" y="2798299"/>
-                  </a:lnTo>
-                  <a:lnTo>
-                    <a:pt x="3366258" y="2793662"/>
-                  </a:lnTo>
-                  <a:lnTo>
-                    <a:pt x="3294636" y="2789001"/>
-                  </a:lnTo>
-                  <a:lnTo>
-                    <a:pt x="3223013" y="2784314"/>
-                  </a:lnTo>
-                  <a:lnTo>
-                    <a:pt x="3151391" y="2820792"/>
-                  </a:lnTo>
-                  <a:lnTo>
-                    <a:pt x="3079768" y="2871060"/>
-                  </a:lnTo>
-                  <a:lnTo>
-                    <a:pt x="3008146" y="2918291"/>
-                  </a:lnTo>
-                  <a:lnTo>
-                    <a:pt x="2936523" y="2962667"/>
-                  </a:lnTo>
-                  <a:lnTo>
-                    <a:pt x="2864901" y="3004362"/>
-                  </a:lnTo>
-                  <a:lnTo>
-                    <a:pt x="2793278" y="3043537"/>
-                  </a:lnTo>
-                  <a:lnTo>
-                    <a:pt x="2721655" y="3080345"/>
-                  </a:lnTo>
-                  <a:lnTo>
-                    <a:pt x="2650033" y="3114929"/>
-                  </a:lnTo>
-                  <a:lnTo>
-                    <a:pt x="2578410" y="3147423"/>
-                  </a:lnTo>
-                  <a:lnTo>
-                    <a:pt x="2506788" y="3177953"/>
-                  </a:lnTo>
-                  <a:lnTo>
-                    <a:pt x="2435165" y="3206638"/>
-                  </a:lnTo>
-                  <a:lnTo>
-                    <a:pt x="2363543" y="3233590"/>
-                  </a:lnTo>
-                  <a:lnTo>
-                    <a:pt x="2291920" y="3258913"/>
-                  </a:lnTo>
-                  <a:lnTo>
-                    <a:pt x="2220298" y="3282706"/>
-                  </a:lnTo>
-                  <a:lnTo>
-                    <a:pt x="2148675" y="3305061"/>
-                  </a:lnTo>
-                  <a:lnTo>
-                    <a:pt x="2077053" y="3326065"/>
-                  </a:lnTo>
-                  <a:lnTo>
-                    <a:pt x="2005430" y="3345800"/>
-                  </a:lnTo>
-                  <a:lnTo>
-                    <a:pt x="1933808" y="3364343"/>
-                  </a:lnTo>
-                  <a:lnTo>
-                    <a:pt x="1862185" y="3381764"/>
-                  </a:lnTo>
-                  <a:lnTo>
-                    <a:pt x="1790563" y="3398133"/>
-                  </a:lnTo>
-                  <a:lnTo>
-                    <a:pt x="1718940" y="3413513"/>
-                  </a:lnTo>
-                  <a:lnTo>
-                    <a:pt x="1647318" y="3427964"/>
-                  </a:lnTo>
-                  <a:lnTo>
-                    <a:pt x="1575695" y="3441541"/>
-                  </a:lnTo>
-                  <a:lnTo>
-                    <a:pt x="1504073" y="3454298"/>
-                  </a:lnTo>
-                  <a:lnTo>
-                    <a:pt x="1432450" y="3466284"/>
-                  </a:lnTo>
-                  <a:lnTo>
-                    <a:pt x="1360827" y="3477545"/>
-                  </a:lnTo>
-                  <a:lnTo>
-                    <a:pt x="1289205" y="3488126"/>
-                  </a:lnTo>
-                  <a:lnTo>
-                    <a:pt x="1217582" y="3498068"/>
-                  </a:lnTo>
-                  <a:lnTo>
-                    <a:pt x="1145960" y="3507409"/>
-                  </a:lnTo>
-                  <a:lnTo>
-                    <a:pt x="1074337" y="3516185"/>
-                  </a:lnTo>
-                  <a:lnTo>
-                    <a:pt x="1002715" y="3524431"/>
-                  </a:lnTo>
-                  <a:lnTo>
-                    <a:pt x="931092" y="3532179"/>
-                  </a:lnTo>
-                  <a:lnTo>
-                    <a:pt x="859470" y="3539459"/>
-                  </a:lnTo>
-                  <a:lnTo>
-                    <a:pt x="787847" y="3546298"/>
-                  </a:lnTo>
-                  <a:lnTo>
-                    <a:pt x="716225" y="3552725"/>
-                  </a:lnTo>
-                  <a:lnTo>
-                    <a:pt x="644602" y="3558763"/>
-                  </a:lnTo>
-                  <a:lnTo>
-                    <a:pt x="572980" y="3564436"/>
-                  </a:lnTo>
-                  <a:lnTo>
-                    <a:pt x="501357" y="3569766"/>
-                  </a:lnTo>
-                  <a:lnTo>
-                    <a:pt x="429735" y="3574774"/>
-                  </a:lnTo>
-                  <a:lnTo>
-                    <a:pt x="358112" y="3579480"/>
-                  </a:lnTo>
-                  <a:lnTo>
-                    <a:pt x="286490" y="3583901"/>
-                  </a:lnTo>
-                  <a:lnTo>
-                    <a:pt x="214867" y="3588055"/>
-                  </a:lnTo>
-                  <a:lnTo>
-                    <a:pt x="143245" y="3591958"/>
-                  </a:lnTo>
-                  <a:lnTo>
-                    <a:pt x="71622" y="3595625"/>
-                  </a:lnTo>
-                  <a:lnTo>
-                    <a:pt x="0" y="3599071"/>
+                    <a:pt x="7090630" y="3017080"/>
+                  </a:lnTo>
+                  <a:lnTo>
+                    <a:pt x="7019007" y="3013436"/>
+                  </a:lnTo>
+                  <a:lnTo>
+                    <a:pt x="6947385" y="3009771"/>
+                  </a:lnTo>
+                  <a:lnTo>
+                    <a:pt x="6875762" y="3006084"/>
+                  </a:lnTo>
+                  <a:lnTo>
+                    <a:pt x="6804139" y="3002377"/>
+                  </a:lnTo>
+                  <a:lnTo>
+                    <a:pt x="6732517" y="2998649"/>
+                  </a:lnTo>
+                  <a:lnTo>
+                    <a:pt x="6660894" y="2994899"/>
+                  </a:lnTo>
+                  <a:lnTo>
+                    <a:pt x="6589272" y="2991128"/>
+                  </a:lnTo>
+                  <a:lnTo>
+                    <a:pt x="6517649" y="2987335"/>
+                  </a:lnTo>
+                  <a:lnTo>
+                    <a:pt x="6446027" y="2983520"/>
+                  </a:lnTo>
+                  <a:lnTo>
+                    <a:pt x="6374404" y="2979683"/>
+                  </a:lnTo>
+                  <a:lnTo>
+                    <a:pt x="6302782" y="2975825"/>
+                  </a:lnTo>
+                  <a:lnTo>
+                    <a:pt x="6231159" y="2971944"/>
+                  </a:lnTo>
+                  <a:lnTo>
+                    <a:pt x="6159537" y="2968041"/>
+                  </a:lnTo>
+                  <a:lnTo>
+                    <a:pt x="6087914" y="2964115"/>
+                  </a:lnTo>
+                  <a:lnTo>
+                    <a:pt x="6016292" y="2960168"/>
+                  </a:lnTo>
+                  <a:lnTo>
+                    <a:pt x="5944669" y="2956197"/>
+                  </a:lnTo>
+                  <a:lnTo>
+                    <a:pt x="5873047" y="2952204"/>
+                  </a:lnTo>
+                  <a:lnTo>
+                    <a:pt x="5801424" y="2948188"/>
+                  </a:lnTo>
+                  <a:lnTo>
+                    <a:pt x="5729802" y="2944148"/>
+                  </a:lnTo>
+                  <a:lnTo>
+                    <a:pt x="5658179" y="2940086"/>
+                  </a:lnTo>
+                  <a:lnTo>
+                    <a:pt x="5586557" y="2936000"/>
+                  </a:lnTo>
+                  <a:lnTo>
+                    <a:pt x="5514934" y="2931891"/>
+                  </a:lnTo>
+                  <a:lnTo>
+                    <a:pt x="5443311" y="2927759"/>
+                  </a:lnTo>
+                  <a:lnTo>
+                    <a:pt x="5371689" y="2923602"/>
+                  </a:lnTo>
+                  <a:lnTo>
+                    <a:pt x="5300066" y="2919422"/>
+                  </a:lnTo>
+                  <a:lnTo>
+                    <a:pt x="5228444" y="2915218"/>
+                  </a:lnTo>
+                  <a:lnTo>
+                    <a:pt x="5156821" y="2910990"/>
+                  </a:lnTo>
+                  <a:lnTo>
+                    <a:pt x="5085199" y="2906737"/>
+                  </a:lnTo>
+                  <a:lnTo>
+                    <a:pt x="5013576" y="2902461"/>
+                  </a:lnTo>
+                  <a:lnTo>
+                    <a:pt x="4941954" y="2898159"/>
+                  </a:lnTo>
+                  <a:lnTo>
+                    <a:pt x="4870331" y="2893833"/>
+                  </a:lnTo>
+                  <a:lnTo>
+                    <a:pt x="4798709" y="2889482"/>
+                  </a:lnTo>
+                  <a:lnTo>
+                    <a:pt x="4727086" y="2885106"/>
+                  </a:lnTo>
+                  <a:lnTo>
+                    <a:pt x="4655464" y="2880706"/>
+                  </a:lnTo>
+                  <a:lnTo>
+                    <a:pt x="4583841" y="2876279"/>
+                  </a:lnTo>
+                  <a:lnTo>
+                    <a:pt x="4512219" y="2871828"/>
+                  </a:lnTo>
+                  <a:lnTo>
+                    <a:pt x="4440596" y="2867351"/>
+                  </a:lnTo>
+                  <a:lnTo>
+                    <a:pt x="4368974" y="2862848"/>
+                  </a:lnTo>
+                  <a:lnTo>
+                    <a:pt x="4297351" y="2858320"/>
+                  </a:lnTo>
+                  <a:lnTo>
+                    <a:pt x="4225729" y="2853765"/>
+                  </a:lnTo>
+                  <a:lnTo>
+                    <a:pt x="4154106" y="2849185"/>
+                  </a:lnTo>
+                  <a:lnTo>
+                    <a:pt x="4082483" y="2844578"/>
+                  </a:lnTo>
+                  <a:lnTo>
+                    <a:pt x="4010861" y="2839944"/>
+                  </a:lnTo>
+                  <a:lnTo>
+                    <a:pt x="3939238" y="2835285"/>
+                  </a:lnTo>
+                  <a:lnTo>
+                    <a:pt x="3867616" y="2830598"/>
+                  </a:lnTo>
+                  <a:lnTo>
+                    <a:pt x="3795993" y="2825885"/>
+                  </a:lnTo>
+                  <a:lnTo>
+                    <a:pt x="3724371" y="2821144"/>
+                  </a:lnTo>
+                  <a:lnTo>
+                    <a:pt x="3652748" y="2816377"/>
+                  </a:lnTo>
+                  <a:lnTo>
+                    <a:pt x="3581126" y="2811582"/>
+                  </a:lnTo>
+                  <a:lnTo>
+                    <a:pt x="3509503" y="2806759"/>
+                  </a:lnTo>
+                  <a:lnTo>
+                    <a:pt x="3437881" y="2801909"/>
+                  </a:lnTo>
+                  <a:lnTo>
+                    <a:pt x="3366258" y="2797031"/>
+                  </a:lnTo>
+                  <a:lnTo>
+                    <a:pt x="3294636" y="2792125"/>
+                  </a:lnTo>
+                  <a:lnTo>
+                    <a:pt x="3223013" y="2787191"/>
+                  </a:lnTo>
+                  <a:lnTo>
+                    <a:pt x="3151391" y="2791006"/>
+                  </a:lnTo>
+                  <a:lnTo>
+                    <a:pt x="3079768" y="2843338"/>
+                  </a:lnTo>
+                  <a:lnTo>
+                    <a:pt x="3008146" y="2892492"/>
+                  </a:lnTo>
+                  <a:lnTo>
+                    <a:pt x="2936523" y="2938660"/>
+                  </a:lnTo>
+                  <a:lnTo>
+                    <a:pt x="2864901" y="2982025"/>
+                  </a:lnTo>
+                  <a:lnTo>
+                    <a:pt x="2793278" y="3022755"/>
+                  </a:lnTo>
+                  <a:lnTo>
+                    <a:pt x="2721655" y="3061012"/>
+                  </a:lnTo>
+                  <a:lnTo>
+                    <a:pt x="2650033" y="3096945"/>
+                  </a:lnTo>
+                  <a:lnTo>
+                    <a:pt x="2578410" y="3130696"/>
+                  </a:lnTo>
+                  <a:lnTo>
+                    <a:pt x="2506788" y="3162397"/>
+                  </a:lnTo>
+                  <a:lnTo>
+                    <a:pt x="2435165" y="3192172"/>
+                  </a:lnTo>
+                  <a:lnTo>
+                    <a:pt x="2363543" y="3220139"/>
+                  </a:lnTo>
+                  <a:lnTo>
+                    <a:pt x="2291920" y="3246408"/>
+                  </a:lnTo>
+                  <a:lnTo>
+                    <a:pt x="2220298" y="3271081"/>
+                  </a:lnTo>
+                  <a:lnTo>
+                    <a:pt x="2148675" y="3294255"/>
+                  </a:lnTo>
+                  <a:lnTo>
+                    <a:pt x="2077053" y="3316022"/>
+                  </a:lnTo>
+                  <a:lnTo>
+                    <a:pt x="2005430" y="3336467"/>
+                  </a:lnTo>
+                  <a:lnTo>
+                    <a:pt x="1933808" y="3355670"/>
+                  </a:lnTo>
+                  <a:lnTo>
+                    <a:pt x="1862185" y="3373707"/>
+                  </a:lnTo>
+                  <a:lnTo>
+                    <a:pt x="1790563" y="3390649"/>
+                  </a:lnTo>
+                  <a:lnTo>
+                    <a:pt x="1718940" y="3406561"/>
+                  </a:lnTo>
+                  <a:lnTo>
+                    <a:pt x="1647318" y="3421507"/>
+                  </a:lnTo>
+                  <a:lnTo>
+                    <a:pt x="1575695" y="3435545"/>
+                  </a:lnTo>
+                  <a:lnTo>
+                    <a:pt x="1504073" y="3448731"/>
+                  </a:lnTo>
+                  <a:lnTo>
+                    <a:pt x="1432450" y="3461116"/>
+                  </a:lnTo>
+                  <a:lnTo>
+                    <a:pt x="1360827" y="3472748"/>
+                  </a:lnTo>
+                  <a:lnTo>
+                    <a:pt x="1289205" y="3483674"/>
+                  </a:lnTo>
+                  <a:lnTo>
+                    <a:pt x="1217582" y="3493937"/>
+                  </a:lnTo>
+                  <a:lnTo>
+                    <a:pt x="1145960" y="3503576"/>
+                  </a:lnTo>
+                  <a:lnTo>
+                    <a:pt x="1074337" y="3512630"/>
+                  </a:lnTo>
+                  <a:lnTo>
+                    <a:pt x="1002715" y="3521133"/>
+                  </a:lnTo>
+                  <a:lnTo>
+                    <a:pt x="931092" y="3529121"/>
+                  </a:lnTo>
+                  <a:lnTo>
+                    <a:pt x="859470" y="3536623"/>
+                  </a:lnTo>
+                  <a:lnTo>
+                    <a:pt x="787847" y="3543670"/>
+                  </a:lnTo>
+                  <a:lnTo>
+                    <a:pt x="716225" y="3550288"/>
+                  </a:lnTo>
+                  <a:lnTo>
+                    <a:pt x="644602" y="3556505"/>
+                  </a:lnTo>
+                  <a:lnTo>
+                    <a:pt x="572980" y="3562344"/>
+                  </a:lnTo>
+                  <a:lnTo>
+                    <a:pt x="501357" y="3567828"/>
+                  </a:lnTo>
+                  <a:lnTo>
+                    <a:pt x="429735" y="3572980"/>
+                  </a:lnTo>
+                  <a:lnTo>
+                    <a:pt x="358112" y="3577818"/>
+                  </a:lnTo>
+                  <a:lnTo>
+                    <a:pt x="286490" y="3582363"/>
+                  </a:lnTo>
+                  <a:lnTo>
+                    <a:pt x="214867" y="3586631"/>
+                  </a:lnTo>
+                  <a:lnTo>
+                    <a:pt x="143245" y="3590640"/>
+                  </a:lnTo>
+                  <a:lnTo>
+                    <a:pt x="71622" y="3594406"/>
+                  </a:lnTo>
+                  <a:lnTo>
+                    <a:pt x="0" y="3597943"/>
                   </a:lnTo>
                   <a:close/>
                 </a:path>
@@ -3501,218 +3501,218 @@
           <p:spPr>
             <a:xfrm>
               <a:off x="1172049" y="1896563"/>
-              <a:ext cx="4851025" cy="2779602"/>
+              <a:ext cx="4802291" cy="2782229"/>
             </a:xfrm>
             <a:custGeom>
               <a:avLst/>
               <a:pathLst>
-                <a:path w="4851025" h="2779602">
+                <a:path w="4802291" h="2782229">
                   <a:moveTo>
-                    <a:pt x="0" y="2544861"/>
+                    <a:pt x="0" y="2533257"/>
                   </a:moveTo>
                   <a:lnTo>
-                    <a:pt x="71622" y="2550840"/>
-                  </a:lnTo>
-                  <a:lnTo>
-                    <a:pt x="143245" y="2556787"/>
-                  </a:lnTo>
-                  <a:lnTo>
-                    <a:pt x="214867" y="2562702"/>
-                  </a:lnTo>
-                  <a:lnTo>
-                    <a:pt x="286490" y="2568585"/>
-                  </a:lnTo>
-                  <a:lnTo>
-                    <a:pt x="358112" y="2574436"/>
-                  </a:lnTo>
-                  <a:lnTo>
-                    <a:pt x="429735" y="2580255"/>
-                  </a:lnTo>
-                  <a:lnTo>
-                    <a:pt x="501357" y="2586044"/>
-                  </a:lnTo>
-                  <a:lnTo>
-                    <a:pt x="572980" y="2591801"/>
-                  </a:lnTo>
-                  <a:lnTo>
-                    <a:pt x="644602" y="2597526"/>
-                  </a:lnTo>
-                  <a:lnTo>
-                    <a:pt x="716225" y="2603221"/>
-                  </a:lnTo>
-                  <a:lnTo>
-                    <a:pt x="787847" y="2608886"/>
-                  </a:lnTo>
-                  <a:lnTo>
-                    <a:pt x="859470" y="2614519"/>
-                  </a:lnTo>
-                  <a:lnTo>
-                    <a:pt x="931092" y="2620123"/>
-                  </a:lnTo>
-                  <a:lnTo>
-                    <a:pt x="1002715" y="2625696"/>
-                  </a:lnTo>
-                  <a:lnTo>
-                    <a:pt x="1074337" y="2631239"/>
-                  </a:lnTo>
-                  <a:lnTo>
-                    <a:pt x="1145960" y="2636752"/>
-                  </a:lnTo>
-                  <a:lnTo>
-                    <a:pt x="1217582" y="2642235"/>
-                  </a:lnTo>
-                  <a:lnTo>
-                    <a:pt x="1289205" y="2647689"/>
-                  </a:lnTo>
-                  <a:lnTo>
-                    <a:pt x="1360827" y="2653113"/>
-                  </a:lnTo>
-                  <a:lnTo>
-                    <a:pt x="1432450" y="2658508"/>
-                  </a:lnTo>
-                  <a:lnTo>
-                    <a:pt x="1504073" y="2663874"/>
-                  </a:lnTo>
-                  <a:lnTo>
-                    <a:pt x="1575695" y="2669210"/>
-                  </a:lnTo>
-                  <a:lnTo>
-                    <a:pt x="1647318" y="2674519"/>
-                  </a:lnTo>
-                  <a:lnTo>
-                    <a:pt x="1718940" y="2679798"/>
-                  </a:lnTo>
-                  <a:lnTo>
-                    <a:pt x="1790563" y="2685049"/>
-                  </a:lnTo>
-                  <a:lnTo>
-                    <a:pt x="1862185" y="2690271"/>
-                  </a:lnTo>
-                  <a:lnTo>
-                    <a:pt x="1933808" y="2695466"/>
-                  </a:lnTo>
-                  <a:lnTo>
-                    <a:pt x="2005430" y="2700632"/>
-                  </a:lnTo>
-                  <a:lnTo>
-                    <a:pt x="2077053" y="2705771"/>
-                  </a:lnTo>
-                  <a:lnTo>
-                    <a:pt x="2148675" y="2710881"/>
-                  </a:lnTo>
-                  <a:lnTo>
-                    <a:pt x="2220298" y="2715965"/>
-                  </a:lnTo>
-                  <a:lnTo>
-                    <a:pt x="2291920" y="2721020"/>
-                  </a:lnTo>
-                  <a:lnTo>
-                    <a:pt x="2363543" y="2726049"/>
-                  </a:lnTo>
-                  <a:lnTo>
-                    <a:pt x="2435165" y="2731050"/>
-                  </a:lnTo>
-                  <a:lnTo>
-                    <a:pt x="2506788" y="2736024"/>
-                  </a:lnTo>
-                  <a:lnTo>
-                    <a:pt x="2578410" y="2740972"/>
-                  </a:lnTo>
-                  <a:lnTo>
-                    <a:pt x="2650033" y="2745892"/>
-                  </a:lnTo>
-                  <a:lnTo>
-                    <a:pt x="2721655" y="2750787"/>
-                  </a:lnTo>
-                  <a:lnTo>
-                    <a:pt x="2793278" y="2755654"/>
-                  </a:lnTo>
-                  <a:lnTo>
-                    <a:pt x="2864901" y="2760496"/>
-                  </a:lnTo>
-                  <a:lnTo>
-                    <a:pt x="2936523" y="2765311"/>
-                  </a:lnTo>
-                  <a:lnTo>
-                    <a:pt x="3008146" y="2770101"/>
-                  </a:lnTo>
-                  <a:lnTo>
-                    <a:pt x="3079768" y="2774864"/>
-                  </a:lnTo>
-                  <a:lnTo>
-                    <a:pt x="3151391" y="2779602"/>
-                  </a:lnTo>
-                  <a:lnTo>
-                    <a:pt x="3223013" y="2767291"/>
-                  </a:lnTo>
-                  <a:lnTo>
-                    <a:pt x="3294636" y="2710348"/>
-                  </a:lnTo>
-                  <a:lnTo>
-                    <a:pt x="3366258" y="2649744"/>
-                  </a:lnTo>
-                  <a:lnTo>
-                    <a:pt x="3437881" y="2585241"/>
-                  </a:lnTo>
-                  <a:lnTo>
-                    <a:pt x="3509503" y="2516590"/>
-                  </a:lnTo>
-                  <a:lnTo>
-                    <a:pt x="3581126" y="2443524"/>
-                  </a:lnTo>
-                  <a:lnTo>
-                    <a:pt x="3652748" y="2365758"/>
-                  </a:lnTo>
-                  <a:lnTo>
-                    <a:pt x="3724371" y="2282991"/>
-                  </a:lnTo>
-                  <a:lnTo>
-                    <a:pt x="3795993" y="2194900"/>
-                  </a:lnTo>
-                  <a:lnTo>
-                    <a:pt x="3867616" y="2101144"/>
-                  </a:lnTo>
-                  <a:lnTo>
-                    <a:pt x="3939238" y="2001358"/>
-                  </a:lnTo>
-                  <a:lnTo>
-                    <a:pt x="4010861" y="1895154"/>
-                  </a:lnTo>
-                  <a:lnTo>
-                    <a:pt x="4082483" y="1782119"/>
-                  </a:lnTo>
-                  <a:lnTo>
-                    <a:pt x="4154106" y="1661815"/>
-                  </a:lnTo>
-                  <a:lnTo>
-                    <a:pt x="4225729" y="1533773"/>
-                  </a:lnTo>
-                  <a:lnTo>
-                    <a:pt x="4297351" y="1397495"/>
-                  </a:lnTo>
-                  <a:lnTo>
-                    <a:pt x="4368974" y="1252453"/>
-                  </a:lnTo>
-                  <a:lnTo>
-                    <a:pt x="4440596" y="1098083"/>
-                  </a:lnTo>
-                  <a:lnTo>
-                    <a:pt x="4512219" y="933784"/>
-                  </a:lnTo>
-                  <a:lnTo>
-                    <a:pt x="4583841" y="758918"/>
-                  </a:lnTo>
-                  <a:lnTo>
-                    <a:pt x="4655464" y="572805"/>
-                  </a:lnTo>
-                  <a:lnTo>
-                    <a:pt x="4727086" y="374722"/>
-                  </a:lnTo>
-                  <a:lnTo>
-                    <a:pt x="4798709" y="163899"/>
-                  </a:lnTo>
-                  <a:lnTo>
-                    <a:pt x="4851025" y="0"/>
+                    <a:pt x="71622" y="2539639"/>
+                  </a:lnTo>
+                  <a:lnTo>
+                    <a:pt x="143245" y="2545985"/>
+                  </a:lnTo>
+                  <a:lnTo>
+                    <a:pt x="214867" y="2552294"/>
+                  </a:lnTo>
+                  <a:lnTo>
+                    <a:pt x="286490" y="2558567"/>
+                  </a:lnTo>
+                  <a:lnTo>
+                    <a:pt x="358112" y="2564804"/>
+                  </a:lnTo>
+                  <a:lnTo>
+                    <a:pt x="429735" y="2571006"/>
+                  </a:lnTo>
+                  <a:lnTo>
+                    <a:pt x="501357" y="2577173"/>
+                  </a:lnTo>
+                  <a:lnTo>
+                    <a:pt x="572980" y="2583304"/>
+                  </a:lnTo>
+                  <a:lnTo>
+                    <a:pt x="644602" y="2589400"/>
+                  </a:lnTo>
+                  <a:lnTo>
+                    <a:pt x="716225" y="2595462"/>
+                  </a:lnTo>
+                  <a:lnTo>
+                    <a:pt x="787847" y="2601489"/>
+                  </a:lnTo>
+                  <a:lnTo>
+                    <a:pt x="859470" y="2607482"/>
+                  </a:lnTo>
+                  <a:lnTo>
+                    <a:pt x="931092" y="2613441"/>
+                  </a:lnTo>
+                  <a:lnTo>
+                    <a:pt x="1002715" y="2619365"/>
+                  </a:lnTo>
+                  <a:lnTo>
+                    <a:pt x="1074337" y="2625256"/>
+                  </a:lnTo>
+                  <a:lnTo>
+                    <a:pt x="1145960" y="2631113"/>
+                  </a:lnTo>
+                  <a:lnTo>
+                    <a:pt x="1217582" y="2636937"/>
+                  </a:lnTo>
+                  <a:lnTo>
+                    <a:pt x="1289205" y="2642728"/>
+                  </a:lnTo>
+                  <a:lnTo>
+                    <a:pt x="1360827" y="2648485"/>
+                  </a:lnTo>
+                  <a:lnTo>
+                    <a:pt x="1432450" y="2654210"/>
+                  </a:lnTo>
+                  <a:lnTo>
+                    <a:pt x="1504073" y="2659902"/>
+                  </a:lnTo>
+                  <a:lnTo>
+                    <a:pt x="1575695" y="2665562"/>
+                  </a:lnTo>
+                  <a:lnTo>
+                    <a:pt x="1647318" y="2671189"/>
+                  </a:lnTo>
+                  <a:lnTo>
+                    <a:pt x="1718940" y="2676785"/>
+                  </a:lnTo>
+                  <a:lnTo>
+                    <a:pt x="1790563" y="2682348"/>
+                  </a:lnTo>
+                  <a:lnTo>
+                    <a:pt x="1862185" y="2687880"/>
+                  </a:lnTo>
+                  <a:lnTo>
+                    <a:pt x="1933808" y="2693380"/>
+                  </a:lnTo>
+                  <a:lnTo>
+                    <a:pt x="2005430" y="2698849"/>
+                  </a:lnTo>
+                  <a:lnTo>
+                    <a:pt x="2077053" y="2704287"/>
+                  </a:lnTo>
+                  <a:lnTo>
+                    <a:pt x="2148675" y="2709693"/>
+                  </a:lnTo>
+                  <a:lnTo>
+                    <a:pt x="2220298" y="2715069"/>
+                  </a:lnTo>
+                  <a:lnTo>
+                    <a:pt x="2291920" y="2720414"/>
+                  </a:lnTo>
+                  <a:lnTo>
+                    <a:pt x="2363543" y="2725729"/>
+                  </a:lnTo>
+                  <a:lnTo>
+                    <a:pt x="2435165" y="2731014"/>
+                  </a:lnTo>
+                  <a:lnTo>
+                    <a:pt x="2506788" y="2736268"/>
+                  </a:lnTo>
+                  <a:lnTo>
+                    <a:pt x="2578410" y="2741492"/>
+                  </a:lnTo>
+                  <a:lnTo>
+                    <a:pt x="2650033" y="2746687"/>
+                  </a:lnTo>
+                  <a:lnTo>
+                    <a:pt x="2721655" y="2751852"/>
+                  </a:lnTo>
+                  <a:lnTo>
+                    <a:pt x="2793278" y="2756987"/>
+                  </a:lnTo>
+                  <a:lnTo>
+                    <a:pt x="2864901" y="2762093"/>
+                  </a:lnTo>
+                  <a:lnTo>
+                    <a:pt x="2936523" y="2767171"/>
+                  </a:lnTo>
+                  <a:lnTo>
+                    <a:pt x="3008146" y="2772219"/>
+                  </a:lnTo>
+                  <a:lnTo>
+                    <a:pt x="3079768" y="2777238"/>
+                  </a:lnTo>
+                  <a:lnTo>
+                    <a:pt x="3151391" y="2782229"/>
+                  </a:lnTo>
+                  <a:lnTo>
+                    <a:pt x="3223013" y="2735290"/>
+                  </a:lnTo>
+                  <a:lnTo>
+                    <a:pt x="3294636" y="2675971"/>
+                  </a:lnTo>
+                  <a:lnTo>
+                    <a:pt x="3366258" y="2612816"/>
+                  </a:lnTo>
+                  <a:lnTo>
+                    <a:pt x="3437881" y="2545578"/>
+                  </a:lnTo>
+                  <a:lnTo>
+                    <a:pt x="3509503" y="2473992"/>
+                  </a:lnTo>
+                  <a:lnTo>
+                    <a:pt x="3581126" y="2397776"/>
+                  </a:lnTo>
+                  <a:lnTo>
+                    <a:pt x="3652748" y="2316633"/>
+                  </a:lnTo>
+                  <a:lnTo>
+                    <a:pt x="3724371" y="2230242"/>
+                  </a:lnTo>
+                  <a:lnTo>
+                    <a:pt x="3795993" y="2138265"/>
+                  </a:lnTo>
+                  <a:lnTo>
+                    <a:pt x="3867616" y="2040341"/>
+                  </a:lnTo>
+                  <a:lnTo>
+                    <a:pt x="3939238" y="1936085"/>
+                  </a:lnTo>
+                  <a:lnTo>
+                    <a:pt x="4010861" y="1825087"/>
+                  </a:lnTo>
+                  <a:lnTo>
+                    <a:pt x="4082483" y="1706911"/>
+                  </a:lnTo>
+                  <a:lnTo>
+                    <a:pt x="4154106" y="1581094"/>
+                  </a:lnTo>
+                  <a:lnTo>
+                    <a:pt x="4225729" y="1447141"/>
+                  </a:lnTo>
+                  <a:lnTo>
+                    <a:pt x="4297351" y="1304526"/>
+                  </a:lnTo>
+                  <a:lnTo>
+                    <a:pt x="4368974" y="1152690"/>
+                  </a:lnTo>
+                  <a:lnTo>
+                    <a:pt x="4440596" y="991035"/>
+                  </a:lnTo>
+                  <a:lnTo>
+                    <a:pt x="4512219" y="818927"/>
+                  </a:lnTo>
+                  <a:lnTo>
+                    <a:pt x="4583841" y="635690"/>
+                  </a:lnTo>
+                  <a:lnTo>
+                    <a:pt x="4655464" y="440605"/>
+                  </a:lnTo>
+                  <a:lnTo>
+                    <a:pt x="4727086" y="232904"/>
+                  </a:lnTo>
+                  <a:lnTo>
+                    <a:pt x="4798709" y="11774"/>
+                  </a:lnTo>
+                  <a:lnTo>
+                    <a:pt x="4802291" y="0"/>
                   </a:lnTo>
                 </a:path>
               </a:pathLst>
@@ -3732,312 +3732,312 @@
           </p:nvSpPr>
           <p:spPr>
             <a:xfrm>
-              <a:off x="1172049" y="4680878"/>
-              <a:ext cx="7090630" cy="814756"/>
+              <a:off x="1172049" y="4683755"/>
+              <a:ext cx="7090630" cy="810752"/>
             </a:xfrm>
             <a:custGeom>
               <a:avLst/>
               <a:pathLst>
-                <a:path w="7090630" h="814756">
+                <a:path w="7090630" h="810752">
                   <a:moveTo>
-                    <a:pt x="7090630" y="220052"/>
+                    <a:pt x="7090630" y="229888"/>
                   </a:moveTo>
                   <a:lnTo>
-                    <a:pt x="7019007" y="216534"/>
-                  </a:lnTo>
-                  <a:lnTo>
-                    <a:pt x="6947385" y="212997"/>
-                  </a:lnTo>
-                  <a:lnTo>
-                    <a:pt x="6875762" y="209441"/>
-                  </a:lnTo>
-                  <a:lnTo>
-                    <a:pt x="6804139" y="205865"/>
-                  </a:lnTo>
-                  <a:lnTo>
-                    <a:pt x="6732517" y="202270"/>
-                  </a:lnTo>
-                  <a:lnTo>
-                    <a:pt x="6660894" y="198656"/>
-                  </a:lnTo>
-                  <a:lnTo>
-                    <a:pt x="6589272" y="195021"/>
-                  </a:lnTo>
-                  <a:lnTo>
-                    <a:pt x="6517649" y="191367"/>
-                  </a:lnTo>
-                  <a:lnTo>
-                    <a:pt x="6446027" y="187694"/>
-                  </a:lnTo>
-                  <a:lnTo>
-                    <a:pt x="6374404" y="184000"/>
-                  </a:lnTo>
-                  <a:lnTo>
-                    <a:pt x="6302782" y="180286"/>
-                  </a:lnTo>
-                  <a:lnTo>
-                    <a:pt x="6231159" y="176553"/>
-                  </a:lnTo>
-                  <a:lnTo>
-                    <a:pt x="6159537" y="172798"/>
-                  </a:lnTo>
-                  <a:lnTo>
-                    <a:pt x="6087914" y="169024"/>
-                  </a:lnTo>
-                  <a:lnTo>
-                    <a:pt x="6016292" y="165229"/>
-                  </a:lnTo>
-                  <a:lnTo>
-                    <a:pt x="5944669" y="161413"/>
-                  </a:lnTo>
-                  <a:lnTo>
-                    <a:pt x="5873047" y="157577"/>
-                  </a:lnTo>
-                  <a:lnTo>
-                    <a:pt x="5801424" y="153720"/>
-                  </a:lnTo>
-                  <a:lnTo>
-                    <a:pt x="5729802" y="149842"/>
-                  </a:lnTo>
-                  <a:lnTo>
-                    <a:pt x="5658179" y="145943"/>
-                  </a:lnTo>
-                  <a:lnTo>
-                    <a:pt x="5586557" y="142023"/>
-                  </a:lnTo>
-                  <a:lnTo>
-                    <a:pt x="5514934" y="138081"/>
-                  </a:lnTo>
-                  <a:lnTo>
-                    <a:pt x="5443311" y="134118"/>
-                  </a:lnTo>
-                  <a:lnTo>
-                    <a:pt x="5371689" y="130134"/>
-                  </a:lnTo>
-                  <a:lnTo>
-                    <a:pt x="5300066" y="126128"/>
-                  </a:lnTo>
-                  <a:lnTo>
-                    <a:pt x="5228444" y="122100"/>
-                  </a:lnTo>
-                  <a:lnTo>
-                    <a:pt x="5156821" y="118051"/>
-                  </a:lnTo>
-                  <a:lnTo>
-                    <a:pt x="5085199" y="113979"/>
-                  </a:lnTo>
-                  <a:lnTo>
-                    <a:pt x="5013576" y="109885"/>
-                  </a:lnTo>
-                  <a:lnTo>
-                    <a:pt x="4941954" y="105769"/>
-                  </a:lnTo>
-                  <a:lnTo>
-                    <a:pt x="4870331" y="101631"/>
-                  </a:lnTo>
-                  <a:lnTo>
-                    <a:pt x="4798709" y="97470"/>
-                  </a:lnTo>
-                  <a:lnTo>
-                    <a:pt x="4727086" y="93287"/>
-                  </a:lnTo>
-                  <a:lnTo>
-                    <a:pt x="4655464" y="89081"/>
-                  </a:lnTo>
-                  <a:lnTo>
-                    <a:pt x="4583841" y="84852"/>
-                  </a:lnTo>
-                  <a:lnTo>
-                    <a:pt x="4512219" y="80601"/>
-                  </a:lnTo>
-                  <a:lnTo>
-                    <a:pt x="4440596" y="76326"/>
-                  </a:lnTo>
-                  <a:lnTo>
-                    <a:pt x="4368974" y="72028"/>
-                  </a:lnTo>
-                  <a:lnTo>
-                    <a:pt x="4297351" y="67706"/>
-                  </a:lnTo>
-                  <a:lnTo>
-                    <a:pt x="4225729" y="63362"/>
-                  </a:lnTo>
-                  <a:lnTo>
-                    <a:pt x="4154106" y="58993"/>
-                  </a:lnTo>
-                  <a:lnTo>
-                    <a:pt x="4082483" y="54601"/>
-                  </a:lnTo>
-                  <a:lnTo>
-                    <a:pt x="4010861" y="50185"/>
-                  </a:lnTo>
-                  <a:lnTo>
-                    <a:pt x="3939238" y="45745"/>
-                  </a:lnTo>
-                  <a:lnTo>
-                    <a:pt x="3867616" y="41281"/>
-                  </a:lnTo>
-                  <a:lnTo>
-                    <a:pt x="3795993" y="36793"/>
-                  </a:lnTo>
-                  <a:lnTo>
-                    <a:pt x="3724371" y="32281"/>
-                  </a:lnTo>
-                  <a:lnTo>
-                    <a:pt x="3652748" y="27744"/>
-                  </a:lnTo>
-                  <a:lnTo>
-                    <a:pt x="3581126" y="23182"/>
-                  </a:lnTo>
-                  <a:lnTo>
-                    <a:pt x="3509503" y="18595"/>
-                  </a:lnTo>
-                  <a:lnTo>
-                    <a:pt x="3437881" y="13984"/>
-                  </a:lnTo>
-                  <a:lnTo>
-                    <a:pt x="3366258" y="9348"/>
-                  </a:lnTo>
-                  <a:lnTo>
-                    <a:pt x="3294636" y="4686"/>
+                    <a:pt x="7019007" y="226244"/>
+                  </a:lnTo>
+                  <a:lnTo>
+                    <a:pt x="6947385" y="222579"/>
+                  </a:lnTo>
+                  <a:lnTo>
+                    <a:pt x="6875762" y="218893"/>
+                  </a:lnTo>
+                  <a:lnTo>
+                    <a:pt x="6804139" y="215186"/>
+                  </a:lnTo>
+                  <a:lnTo>
+                    <a:pt x="6732517" y="211457"/>
+                  </a:lnTo>
+                  <a:lnTo>
+                    <a:pt x="6660894" y="207707"/>
+                  </a:lnTo>
+                  <a:lnTo>
+                    <a:pt x="6589272" y="203936"/>
+                  </a:lnTo>
+                  <a:lnTo>
+                    <a:pt x="6517649" y="200143"/>
+                  </a:lnTo>
+                  <a:lnTo>
+                    <a:pt x="6446027" y="196328"/>
+                  </a:lnTo>
+                  <a:lnTo>
+                    <a:pt x="6374404" y="192492"/>
+                  </a:lnTo>
+                  <a:lnTo>
+                    <a:pt x="6302782" y="188633"/>
+                  </a:lnTo>
+                  <a:lnTo>
+                    <a:pt x="6231159" y="184752"/>
+                  </a:lnTo>
+                  <a:lnTo>
+                    <a:pt x="6159537" y="180849"/>
+                  </a:lnTo>
+                  <a:lnTo>
+                    <a:pt x="6087914" y="176924"/>
+                  </a:lnTo>
+                  <a:lnTo>
+                    <a:pt x="6016292" y="172976"/>
+                  </a:lnTo>
+                  <a:lnTo>
+                    <a:pt x="5944669" y="169005"/>
+                  </a:lnTo>
+                  <a:lnTo>
+                    <a:pt x="5873047" y="165012"/>
+                  </a:lnTo>
+                  <a:lnTo>
+                    <a:pt x="5801424" y="160996"/>
+                  </a:lnTo>
+                  <a:lnTo>
+                    <a:pt x="5729802" y="156957"/>
+                  </a:lnTo>
+                  <a:lnTo>
+                    <a:pt x="5658179" y="152894"/>
+                  </a:lnTo>
+                  <a:lnTo>
+                    <a:pt x="5586557" y="148809"/>
+                  </a:lnTo>
+                  <a:lnTo>
+                    <a:pt x="5514934" y="144700"/>
+                  </a:lnTo>
+                  <a:lnTo>
+                    <a:pt x="5443311" y="140567"/>
+                  </a:lnTo>
+                  <a:lnTo>
+                    <a:pt x="5371689" y="136411"/>
+                  </a:lnTo>
+                  <a:lnTo>
+                    <a:pt x="5300066" y="132231"/>
+                  </a:lnTo>
+                  <a:lnTo>
+                    <a:pt x="5228444" y="128026"/>
+                  </a:lnTo>
+                  <a:lnTo>
+                    <a:pt x="5156821" y="123798"/>
+                  </a:lnTo>
+                  <a:lnTo>
+                    <a:pt x="5085199" y="119546"/>
+                  </a:lnTo>
+                  <a:lnTo>
+                    <a:pt x="5013576" y="115269"/>
+                  </a:lnTo>
+                  <a:lnTo>
+                    <a:pt x="4941954" y="110967"/>
+                  </a:lnTo>
+                  <a:lnTo>
+                    <a:pt x="4870331" y="106641"/>
+                  </a:lnTo>
+                  <a:lnTo>
+                    <a:pt x="4798709" y="102291"/>
+                  </a:lnTo>
+                  <a:lnTo>
+                    <a:pt x="4727086" y="97915"/>
+                  </a:lnTo>
+                  <a:lnTo>
+                    <a:pt x="4655464" y="93514"/>
+                  </a:lnTo>
+                  <a:lnTo>
+                    <a:pt x="4583841" y="89088"/>
+                  </a:lnTo>
+                  <a:lnTo>
+                    <a:pt x="4512219" y="84636"/>
+                  </a:lnTo>
+                  <a:lnTo>
+                    <a:pt x="4440596" y="80159"/>
+                  </a:lnTo>
+                  <a:lnTo>
+                    <a:pt x="4368974" y="75657"/>
+                  </a:lnTo>
+                  <a:lnTo>
+                    <a:pt x="4297351" y="71128"/>
+                  </a:lnTo>
+                  <a:lnTo>
+                    <a:pt x="4225729" y="66574"/>
+                  </a:lnTo>
+                  <a:lnTo>
+                    <a:pt x="4154106" y="61993"/>
+                  </a:lnTo>
+                  <a:lnTo>
+                    <a:pt x="4082483" y="57386"/>
+                  </a:lnTo>
+                  <a:lnTo>
+                    <a:pt x="4010861" y="52753"/>
+                  </a:lnTo>
+                  <a:lnTo>
+                    <a:pt x="3939238" y="48093"/>
+                  </a:lnTo>
+                  <a:lnTo>
+                    <a:pt x="3867616" y="43406"/>
+                  </a:lnTo>
+                  <a:lnTo>
+                    <a:pt x="3795993" y="38693"/>
+                  </a:lnTo>
+                  <a:lnTo>
+                    <a:pt x="3724371" y="33953"/>
+                  </a:lnTo>
+                  <a:lnTo>
+                    <a:pt x="3652748" y="29185"/>
+                  </a:lnTo>
+                  <a:lnTo>
+                    <a:pt x="3581126" y="24390"/>
+                  </a:lnTo>
+                  <a:lnTo>
+                    <a:pt x="3509503" y="19567"/>
+                  </a:lnTo>
+                  <a:lnTo>
+                    <a:pt x="3437881" y="14717"/>
+                  </a:lnTo>
+                  <a:lnTo>
+                    <a:pt x="3366258" y="9839"/>
+                  </a:lnTo>
+                  <a:lnTo>
+                    <a:pt x="3294636" y="4934"/>
                   </a:lnTo>
                   <a:lnTo>
                     <a:pt x="3223013" y="0"/>
                   </a:lnTo>
                   <a:lnTo>
-                    <a:pt x="3151391" y="36477"/>
-                  </a:lnTo>
-                  <a:lnTo>
-                    <a:pt x="3079768" y="86746"/>
-                  </a:lnTo>
-                  <a:lnTo>
-                    <a:pt x="3008146" y="133976"/>
-                  </a:lnTo>
-                  <a:lnTo>
-                    <a:pt x="2936523" y="178353"/>
-                  </a:lnTo>
-                  <a:lnTo>
-                    <a:pt x="2864901" y="220048"/>
-                  </a:lnTo>
-                  <a:lnTo>
-                    <a:pt x="2793278" y="259223"/>
-                  </a:lnTo>
-                  <a:lnTo>
-                    <a:pt x="2721655" y="296031"/>
-                  </a:lnTo>
-                  <a:lnTo>
-                    <a:pt x="2650033" y="330614"/>
-                  </a:lnTo>
-                  <a:lnTo>
-                    <a:pt x="2578410" y="363108"/>
-                  </a:lnTo>
-                  <a:lnTo>
-                    <a:pt x="2506788" y="393638"/>
-                  </a:lnTo>
-                  <a:lnTo>
-                    <a:pt x="2435165" y="422324"/>
-                  </a:lnTo>
-                  <a:lnTo>
-                    <a:pt x="2363543" y="449275"/>
-                  </a:lnTo>
-                  <a:lnTo>
-                    <a:pt x="2291920" y="474599"/>
-                  </a:lnTo>
-                  <a:lnTo>
-                    <a:pt x="2220298" y="498391"/>
-                  </a:lnTo>
-                  <a:lnTo>
-                    <a:pt x="2148675" y="520747"/>
-                  </a:lnTo>
-                  <a:lnTo>
-                    <a:pt x="2077053" y="541751"/>
-                  </a:lnTo>
-                  <a:lnTo>
-                    <a:pt x="2005430" y="561486"/>
-                  </a:lnTo>
-                  <a:lnTo>
-                    <a:pt x="1933808" y="580028"/>
-                  </a:lnTo>
-                  <a:lnTo>
-                    <a:pt x="1862185" y="597450"/>
-                  </a:lnTo>
-                  <a:lnTo>
-                    <a:pt x="1790563" y="613819"/>
-                  </a:lnTo>
-                  <a:lnTo>
-                    <a:pt x="1718940" y="629199"/>
-                  </a:lnTo>
-                  <a:lnTo>
-                    <a:pt x="1647318" y="643649"/>
-                  </a:lnTo>
-                  <a:lnTo>
-                    <a:pt x="1575695" y="657226"/>
-                  </a:lnTo>
-                  <a:lnTo>
-                    <a:pt x="1504073" y="669983"/>
-                  </a:lnTo>
-                  <a:lnTo>
-                    <a:pt x="1432450" y="681969"/>
-                  </a:lnTo>
-                  <a:lnTo>
-                    <a:pt x="1360827" y="693231"/>
-                  </a:lnTo>
-                  <a:lnTo>
-                    <a:pt x="1289205" y="703812"/>
-                  </a:lnTo>
-                  <a:lnTo>
-                    <a:pt x="1217582" y="713753"/>
-                  </a:lnTo>
-                  <a:lnTo>
-                    <a:pt x="1145960" y="723094"/>
-                  </a:lnTo>
-                  <a:lnTo>
-                    <a:pt x="1074337" y="731871"/>
-                  </a:lnTo>
-                  <a:lnTo>
-                    <a:pt x="1002715" y="740117"/>
-                  </a:lnTo>
-                  <a:lnTo>
-                    <a:pt x="931092" y="747865"/>
-                  </a:lnTo>
-                  <a:lnTo>
-                    <a:pt x="859470" y="755144"/>
-                  </a:lnTo>
-                  <a:lnTo>
-                    <a:pt x="787847" y="761984"/>
-                  </a:lnTo>
-                  <a:lnTo>
-                    <a:pt x="716225" y="768410"/>
-                  </a:lnTo>
-                  <a:lnTo>
-                    <a:pt x="644602" y="774448"/>
-                  </a:lnTo>
-                  <a:lnTo>
-                    <a:pt x="572980" y="780121"/>
-                  </a:lnTo>
-                  <a:lnTo>
-                    <a:pt x="501357" y="785452"/>
-                  </a:lnTo>
-                  <a:lnTo>
-                    <a:pt x="429735" y="790460"/>
-                  </a:lnTo>
-                  <a:lnTo>
-                    <a:pt x="358112" y="795165"/>
-                  </a:lnTo>
-                  <a:lnTo>
-                    <a:pt x="286490" y="799587"/>
-                  </a:lnTo>
-                  <a:lnTo>
-                    <a:pt x="214867" y="803741"/>
-                  </a:lnTo>
-                  <a:lnTo>
-                    <a:pt x="143245" y="807644"/>
-                  </a:lnTo>
-                  <a:lnTo>
-                    <a:pt x="71622" y="811311"/>
-                  </a:lnTo>
-                  <a:lnTo>
-                    <a:pt x="0" y="814756"/>
+                    <a:pt x="3151391" y="3814"/>
+                  </a:lnTo>
+                  <a:lnTo>
+                    <a:pt x="3079768" y="56147"/>
+                  </a:lnTo>
+                  <a:lnTo>
+                    <a:pt x="3008146" y="105300"/>
+                  </a:lnTo>
+                  <a:lnTo>
+                    <a:pt x="2936523" y="151469"/>
+                  </a:lnTo>
+                  <a:lnTo>
+                    <a:pt x="2864901" y="194833"/>
+                  </a:lnTo>
+                  <a:lnTo>
+                    <a:pt x="2793278" y="235564"/>
+                  </a:lnTo>
+                  <a:lnTo>
+                    <a:pt x="2721655" y="273820"/>
+                  </a:lnTo>
+                  <a:lnTo>
+                    <a:pt x="2650033" y="309753"/>
+                  </a:lnTo>
+                  <a:lnTo>
+                    <a:pt x="2578410" y="343504"/>
+                  </a:lnTo>
+                  <a:lnTo>
+                    <a:pt x="2506788" y="375205"/>
+                  </a:lnTo>
+                  <a:lnTo>
+                    <a:pt x="2435165" y="404981"/>
+                  </a:lnTo>
+                  <a:lnTo>
+                    <a:pt x="2363543" y="432948"/>
+                  </a:lnTo>
+                  <a:lnTo>
+                    <a:pt x="2291920" y="459216"/>
+                  </a:lnTo>
+                  <a:lnTo>
+                    <a:pt x="2220298" y="483889"/>
+                  </a:lnTo>
+                  <a:lnTo>
+                    <a:pt x="2148675" y="507064"/>
+                  </a:lnTo>
+                  <a:lnTo>
+                    <a:pt x="2077053" y="528831"/>
+                  </a:lnTo>
+                  <a:lnTo>
+                    <a:pt x="2005430" y="549275"/>
+                  </a:lnTo>
+                  <a:lnTo>
+                    <a:pt x="1933808" y="568479"/>
+                  </a:lnTo>
+                  <a:lnTo>
+                    <a:pt x="1862185" y="586516"/>
+                  </a:lnTo>
+                  <a:lnTo>
+                    <a:pt x="1790563" y="603457"/>
+                  </a:lnTo>
+                  <a:lnTo>
+                    <a:pt x="1718940" y="619369"/>
+                  </a:lnTo>
+                  <a:lnTo>
+                    <a:pt x="1647318" y="634315"/>
+                  </a:lnTo>
+                  <a:lnTo>
+                    <a:pt x="1575695" y="648354"/>
+                  </a:lnTo>
+                  <a:lnTo>
+                    <a:pt x="1504073" y="661539"/>
+                  </a:lnTo>
+                  <a:lnTo>
+                    <a:pt x="1432450" y="673924"/>
+                  </a:lnTo>
+                  <a:lnTo>
+                    <a:pt x="1360827" y="685557"/>
+                  </a:lnTo>
+                  <a:lnTo>
+                    <a:pt x="1289205" y="696483"/>
+                  </a:lnTo>
+                  <a:lnTo>
+                    <a:pt x="1217582" y="706745"/>
+                  </a:lnTo>
+                  <a:lnTo>
+                    <a:pt x="1145960" y="716384"/>
+                  </a:lnTo>
+                  <a:lnTo>
+                    <a:pt x="1074337" y="725438"/>
+                  </a:lnTo>
+                  <a:lnTo>
+                    <a:pt x="1002715" y="733942"/>
+                  </a:lnTo>
+                  <a:lnTo>
+                    <a:pt x="931092" y="741929"/>
+                  </a:lnTo>
+                  <a:lnTo>
+                    <a:pt x="859470" y="749431"/>
+                  </a:lnTo>
+                  <a:lnTo>
+                    <a:pt x="787847" y="756478"/>
+                  </a:lnTo>
+                  <a:lnTo>
+                    <a:pt x="716225" y="763097"/>
+                  </a:lnTo>
+                  <a:lnTo>
+                    <a:pt x="644602" y="769313"/>
+                  </a:lnTo>
+                  <a:lnTo>
+                    <a:pt x="572980" y="775152"/>
+                  </a:lnTo>
+                  <a:lnTo>
+                    <a:pt x="501357" y="780637"/>
+                  </a:lnTo>
+                  <a:lnTo>
+                    <a:pt x="429735" y="785788"/>
+                  </a:lnTo>
+                  <a:lnTo>
+                    <a:pt x="358112" y="790626"/>
+                  </a:lnTo>
+                  <a:lnTo>
+                    <a:pt x="286490" y="795171"/>
+                  </a:lnTo>
+                  <a:lnTo>
+                    <a:pt x="214867" y="799439"/>
+                  </a:lnTo>
+                  <a:lnTo>
+                    <a:pt x="143245" y="803449"/>
+                  </a:lnTo>
+                  <a:lnTo>
+                    <a:pt x="71622" y="807215"/>
+                  </a:lnTo>
+                  <a:lnTo>
+                    <a:pt x="0" y="810752"/>
                   </a:lnTo>
                 </a:path>
               </a:pathLst>
@@ -4058,302 +4058,299 @@
           <p:spPr>
             <a:xfrm>
               <a:off x="1172049" y="1896563"/>
-              <a:ext cx="6813891" cy="3409032"/>
+              <a:ext cx="6771961" cy="3405196"/>
             </a:xfrm>
             <a:custGeom>
               <a:avLst/>
               <a:pathLst>
-                <a:path w="6813891" h="3409032">
+                <a:path w="6771961" h="3405196">
                   <a:moveTo>
-                    <a:pt x="0" y="3409032"/>
+                    <a:pt x="0" y="3405196"/>
                   </a:moveTo>
                   <a:lnTo>
-                    <a:pt x="71622" y="3401999"/>
-                  </a:lnTo>
-                  <a:lnTo>
-                    <a:pt x="143245" y="3394763"/>
-                  </a:lnTo>
-                  <a:lnTo>
-                    <a:pt x="214867" y="3387319"/>
-                  </a:lnTo>
-                  <a:lnTo>
-                    <a:pt x="286490" y="3379659"/>
-                  </a:lnTo>
-                  <a:lnTo>
-                    <a:pt x="358112" y="3371778"/>
-                  </a:lnTo>
-                  <a:lnTo>
-                    <a:pt x="429735" y="3363670"/>
-                  </a:lnTo>
-                  <a:lnTo>
-                    <a:pt x="501357" y="3355328"/>
-                  </a:lnTo>
-                  <a:lnTo>
-                    <a:pt x="572980" y="3346744"/>
-                  </a:lnTo>
-                  <a:lnTo>
-                    <a:pt x="644602" y="3337913"/>
-                  </a:lnTo>
-                  <a:lnTo>
-                    <a:pt x="716225" y="3328828"/>
-                  </a:lnTo>
-                  <a:lnTo>
-                    <a:pt x="787847" y="3319479"/>
-                  </a:lnTo>
-                  <a:lnTo>
-                    <a:pt x="859470" y="3309861"/>
-                  </a:lnTo>
-                  <a:lnTo>
-                    <a:pt x="931092" y="3299965"/>
-                  </a:lnTo>
-                  <a:lnTo>
-                    <a:pt x="1002715" y="3289784"/>
-                  </a:lnTo>
-                  <a:lnTo>
-                    <a:pt x="1074337" y="3279309"/>
-                  </a:lnTo>
-                  <a:lnTo>
-                    <a:pt x="1145960" y="3268531"/>
-                  </a:lnTo>
-                  <a:lnTo>
-                    <a:pt x="1217582" y="3257442"/>
-                  </a:lnTo>
-                  <a:lnTo>
-                    <a:pt x="1289205" y="3246033"/>
-                  </a:lnTo>
-                  <a:lnTo>
-                    <a:pt x="1360827" y="3234294"/>
-                  </a:lnTo>
-                  <a:lnTo>
-                    <a:pt x="1432450" y="3222217"/>
-                  </a:lnTo>
-                  <a:lnTo>
-                    <a:pt x="1504073" y="3209791"/>
-                  </a:lnTo>
-                  <a:lnTo>
-                    <a:pt x="1575695" y="3197007"/>
-                  </a:lnTo>
-                  <a:lnTo>
-                    <a:pt x="1647318" y="3183853"/>
-                  </a:lnTo>
-                  <a:lnTo>
-                    <a:pt x="1718940" y="3170319"/>
-                  </a:lnTo>
-                  <a:lnTo>
-                    <a:pt x="1790563" y="3156395"/>
-                  </a:lnTo>
-                  <a:lnTo>
-                    <a:pt x="1862185" y="3142069"/>
-                  </a:lnTo>
-                  <a:lnTo>
-                    <a:pt x="1933808" y="3127329"/>
-                  </a:lnTo>
-                  <a:lnTo>
-                    <a:pt x="2005430" y="3112164"/>
-                  </a:lnTo>
-                  <a:lnTo>
-                    <a:pt x="2077053" y="3096561"/>
-                  </a:lnTo>
-                  <a:lnTo>
-                    <a:pt x="2148675" y="3080507"/>
-                  </a:lnTo>
-                  <a:lnTo>
-                    <a:pt x="2220298" y="3063990"/>
-                  </a:lnTo>
-                  <a:lnTo>
-                    <a:pt x="2291920" y="3046996"/>
-                  </a:lnTo>
-                  <a:lnTo>
-                    <a:pt x="2363543" y="3029512"/>
-                  </a:lnTo>
-                  <a:lnTo>
-                    <a:pt x="2435165" y="3011523"/>
-                  </a:lnTo>
-                  <a:lnTo>
-                    <a:pt x="2506788" y="2993014"/>
-                  </a:lnTo>
-                  <a:lnTo>
-                    <a:pt x="2578410" y="2973972"/>
-                  </a:lnTo>
-                  <a:lnTo>
-                    <a:pt x="2650033" y="2954379"/>
-                  </a:lnTo>
-                  <a:lnTo>
-                    <a:pt x="2721655" y="2934221"/>
-                  </a:lnTo>
-                  <a:lnTo>
-                    <a:pt x="2793278" y="2913481"/>
-                  </a:lnTo>
-                  <a:lnTo>
-                    <a:pt x="2864901" y="2892142"/>
-                  </a:lnTo>
-                  <a:lnTo>
-                    <a:pt x="2936523" y="2870187"/>
-                  </a:lnTo>
-                  <a:lnTo>
-                    <a:pt x="3008146" y="2847598"/>
-                  </a:lnTo>
-                  <a:lnTo>
-                    <a:pt x="3079768" y="2824358"/>
-                  </a:lnTo>
-                  <a:lnTo>
-                    <a:pt x="3151391" y="2800446"/>
-                  </a:lnTo>
-                  <a:lnTo>
-                    <a:pt x="3223013" y="2775844"/>
-                  </a:lnTo>
-                  <a:lnTo>
-                    <a:pt x="3294636" y="2750531"/>
-                  </a:lnTo>
-                  <a:lnTo>
-                    <a:pt x="3366258" y="2724488"/>
-                  </a:lnTo>
-                  <a:lnTo>
-                    <a:pt x="3437881" y="2697693"/>
-                  </a:lnTo>
-                  <a:lnTo>
-                    <a:pt x="3509503" y="2670125"/>
-                  </a:lnTo>
-                  <a:lnTo>
-                    <a:pt x="3581126" y="2641761"/>
-                  </a:lnTo>
-                  <a:lnTo>
-                    <a:pt x="3652748" y="2612578"/>
-                  </a:lnTo>
-                  <a:lnTo>
-                    <a:pt x="3724371" y="2582552"/>
-                  </a:lnTo>
-                  <a:lnTo>
-                    <a:pt x="3795993" y="2551660"/>
-                  </a:lnTo>
-                  <a:lnTo>
-                    <a:pt x="3867616" y="2519875"/>
-                  </a:lnTo>
-                  <a:lnTo>
-                    <a:pt x="3939238" y="2487174"/>
-                  </a:lnTo>
-                  <a:lnTo>
-                    <a:pt x="4010861" y="2453528"/>
-                  </a:lnTo>
-                  <a:lnTo>
-                    <a:pt x="4082483" y="2418910"/>
-                  </a:lnTo>
-                  <a:lnTo>
-                    <a:pt x="4154106" y="2383294"/>
-                  </a:lnTo>
-                  <a:lnTo>
-                    <a:pt x="4225729" y="2346649"/>
-                  </a:lnTo>
-                  <a:lnTo>
-                    <a:pt x="4297351" y="2308946"/>
-                  </a:lnTo>
-                  <a:lnTo>
-                    <a:pt x="4368974" y="2270155"/>
-                  </a:lnTo>
-                  <a:lnTo>
-                    <a:pt x="4440596" y="2230244"/>
-                  </a:lnTo>
-                  <a:lnTo>
-                    <a:pt x="4512219" y="2189181"/>
-                  </a:lnTo>
-                  <a:lnTo>
-                    <a:pt x="4583841" y="2146932"/>
-                  </a:lnTo>
-                  <a:lnTo>
-                    <a:pt x="4655464" y="2103464"/>
-                  </a:lnTo>
-                  <a:lnTo>
-                    <a:pt x="4727086" y="2058741"/>
-                  </a:lnTo>
-                  <a:lnTo>
-                    <a:pt x="4798709" y="2012726"/>
-                  </a:lnTo>
-                  <a:lnTo>
-                    <a:pt x="4870331" y="1965384"/>
-                  </a:lnTo>
-                  <a:lnTo>
-                    <a:pt x="4941954" y="1916674"/>
-                  </a:lnTo>
-                  <a:lnTo>
-                    <a:pt x="5013576" y="1866559"/>
-                  </a:lnTo>
-                  <a:lnTo>
-                    <a:pt x="5085199" y="1814996"/>
-                  </a:lnTo>
-                  <a:lnTo>
-                    <a:pt x="5156821" y="1761945"/>
-                  </a:lnTo>
-                  <a:lnTo>
-                    <a:pt x="5228444" y="1707363"/>
-                  </a:lnTo>
-                  <a:lnTo>
-                    <a:pt x="5300066" y="1651205"/>
-                  </a:lnTo>
-                  <a:lnTo>
-                    <a:pt x="5371689" y="1593425"/>
-                  </a:lnTo>
-                  <a:lnTo>
-                    <a:pt x="5443311" y="1533978"/>
-                  </a:lnTo>
-                  <a:lnTo>
-                    <a:pt x="5514934" y="1472814"/>
-                  </a:lnTo>
-                  <a:lnTo>
-                    <a:pt x="5586557" y="1409884"/>
-                  </a:lnTo>
-                  <a:lnTo>
-                    <a:pt x="5658179" y="1345138"/>
-                  </a:lnTo>
-                  <a:lnTo>
-                    <a:pt x="5729802" y="1278523"/>
-                  </a:lnTo>
-                  <a:lnTo>
-                    <a:pt x="5801424" y="1209985"/>
-                  </a:lnTo>
-                  <a:lnTo>
-                    <a:pt x="5873047" y="1139468"/>
-                  </a:lnTo>
-                  <a:lnTo>
-                    <a:pt x="5944669" y="1066915"/>
-                  </a:lnTo>
-                  <a:lnTo>
-                    <a:pt x="6016292" y="992268"/>
-                  </a:lnTo>
-                  <a:lnTo>
-                    <a:pt x="6087914" y="915465"/>
-                  </a:lnTo>
-                  <a:lnTo>
-                    <a:pt x="6159537" y="836446"/>
-                  </a:lnTo>
-                  <a:lnTo>
-                    <a:pt x="6231159" y="755145"/>
-                  </a:lnTo>
-                  <a:lnTo>
-                    <a:pt x="6302782" y="671497"/>
-                  </a:lnTo>
-                  <a:lnTo>
-                    <a:pt x="6374404" y="585435"/>
-                  </a:lnTo>
-                  <a:lnTo>
-                    <a:pt x="6446027" y="496887"/>
-                  </a:lnTo>
-                  <a:lnTo>
-                    <a:pt x="6517649" y="405784"/>
-                  </a:lnTo>
-                  <a:lnTo>
-                    <a:pt x="6589272" y="312051"/>
-                  </a:lnTo>
-                  <a:lnTo>
-                    <a:pt x="6660894" y="215611"/>
-                  </a:lnTo>
-                  <a:lnTo>
-                    <a:pt x="6732517" y="116388"/>
-                  </a:lnTo>
-                  <a:lnTo>
-                    <a:pt x="6804139" y="14300"/>
-                  </a:lnTo>
-                  <a:lnTo>
-                    <a:pt x="6813891" y="0"/>
+                    <a:pt x="71622" y="3398049"/>
+                  </a:lnTo>
+                  <a:lnTo>
+                    <a:pt x="143245" y="3390697"/>
+                  </a:lnTo>
+                  <a:lnTo>
+                    <a:pt x="214867" y="3383132"/>
+                  </a:lnTo>
+                  <a:lnTo>
+                    <a:pt x="286490" y="3375348"/>
+                  </a:lnTo>
+                  <a:lnTo>
+                    <a:pt x="358112" y="3367340"/>
+                  </a:lnTo>
+                  <a:lnTo>
+                    <a:pt x="429735" y="3359101"/>
+                  </a:lnTo>
+                  <a:lnTo>
+                    <a:pt x="501357" y="3350623"/>
+                  </a:lnTo>
+                  <a:lnTo>
+                    <a:pt x="572980" y="3341901"/>
+                  </a:lnTo>
+                  <a:lnTo>
+                    <a:pt x="644602" y="3332927"/>
+                  </a:lnTo>
+                  <a:lnTo>
+                    <a:pt x="716225" y="3323694"/>
+                  </a:lnTo>
+                  <a:lnTo>
+                    <a:pt x="787847" y="3314194"/>
+                  </a:lnTo>
+                  <a:lnTo>
+                    <a:pt x="859470" y="3304419"/>
+                  </a:lnTo>
+                  <a:lnTo>
+                    <a:pt x="931092" y="3294363"/>
+                  </a:lnTo>
+                  <a:lnTo>
+                    <a:pt x="1002715" y="3284016"/>
+                  </a:lnTo>
+                  <a:lnTo>
+                    <a:pt x="1074337" y="3273370"/>
+                  </a:lnTo>
+                  <a:lnTo>
+                    <a:pt x="1145960" y="3262417"/>
+                  </a:lnTo>
+                  <a:lnTo>
+                    <a:pt x="1217582" y="3251147"/>
+                  </a:lnTo>
+                  <a:lnTo>
+                    <a:pt x="1289205" y="3239552"/>
+                  </a:lnTo>
+                  <a:lnTo>
+                    <a:pt x="1360827" y="3227622"/>
+                  </a:lnTo>
+                  <a:lnTo>
+                    <a:pt x="1432450" y="3215348"/>
+                  </a:lnTo>
+                  <a:lnTo>
+                    <a:pt x="1504073" y="3202719"/>
+                  </a:lnTo>
+                  <a:lnTo>
+                    <a:pt x="1575695" y="3189725"/>
+                  </a:lnTo>
+                  <a:lnTo>
+                    <a:pt x="1647318" y="3176356"/>
+                  </a:lnTo>
+                  <a:lnTo>
+                    <a:pt x="1718940" y="3162601"/>
+                  </a:lnTo>
+                  <a:lnTo>
+                    <a:pt x="1790563" y="3148449"/>
+                  </a:lnTo>
+                  <a:lnTo>
+                    <a:pt x="1862185" y="3133888"/>
+                  </a:lnTo>
+                  <a:lnTo>
+                    <a:pt x="1933808" y="3118906"/>
+                  </a:lnTo>
+                  <a:lnTo>
+                    <a:pt x="2005430" y="3103492"/>
+                  </a:lnTo>
+                  <a:lnTo>
+                    <a:pt x="2077053" y="3087633"/>
+                  </a:lnTo>
+                  <a:lnTo>
+                    <a:pt x="2148675" y="3071316"/>
+                  </a:lnTo>
+                  <a:lnTo>
+                    <a:pt x="2220298" y="3054527"/>
+                  </a:lnTo>
+                  <a:lnTo>
+                    <a:pt x="2291920" y="3037254"/>
+                  </a:lnTo>
+                  <a:lnTo>
+                    <a:pt x="2363543" y="3019481"/>
+                  </a:lnTo>
+                  <a:lnTo>
+                    <a:pt x="2435165" y="3001196"/>
+                  </a:lnTo>
+                  <a:lnTo>
+                    <a:pt x="2506788" y="2982382"/>
+                  </a:lnTo>
+                  <a:lnTo>
+                    <a:pt x="2578410" y="2963025"/>
+                  </a:lnTo>
+                  <a:lnTo>
+                    <a:pt x="2650033" y="2943109"/>
+                  </a:lnTo>
+                  <a:lnTo>
+                    <a:pt x="2721655" y="2922618"/>
+                  </a:lnTo>
+                  <a:lnTo>
+                    <a:pt x="2793278" y="2901535"/>
+                  </a:lnTo>
+                  <a:lnTo>
+                    <a:pt x="2864901" y="2879844"/>
+                  </a:lnTo>
+                  <a:lnTo>
+                    <a:pt x="2936523" y="2857525"/>
+                  </a:lnTo>
+                  <a:lnTo>
+                    <a:pt x="3008146" y="2834563"/>
+                  </a:lnTo>
+                  <a:lnTo>
+                    <a:pt x="3079768" y="2810937"/>
+                  </a:lnTo>
+                  <a:lnTo>
+                    <a:pt x="3151391" y="2786629"/>
+                  </a:lnTo>
+                  <a:lnTo>
+                    <a:pt x="3223013" y="2761618"/>
+                  </a:lnTo>
+                  <a:lnTo>
+                    <a:pt x="3294636" y="2735886"/>
+                  </a:lnTo>
+                  <a:lnTo>
+                    <a:pt x="3366258" y="2709410"/>
+                  </a:lnTo>
+                  <a:lnTo>
+                    <a:pt x="3437881" y="2682170"/>
+                  </a:lnTo>
+                  <a:lnTo>
+                    <a:pt x="3509503" y="2654143"/>
+                  </a:lnTo>
+                  <a:lnTo>
+                    <a:pt x="3581126" y="2625307"/>
+                  </a:lnTo>
+                  <a:lnTo>
+                    <a:pt x="3652748" y="2595638"/>
+                  </a:lnTo>
+                  <a:lnTo>
+                    <a:pt x="3724371" y="2565112"/>
+                  </a:lnTo>
+                  <a:lnTo>
+                    <a:pt x="3795993" y="2533704"/>
+                  </a:lnTo>
+                  <a:lnTo>
+                    <a:pt x="3867616" y="2501389"/>
+                  </a:lnTo>
+                  <a:lnTo>
+                    <a:pt x="3939238" y="2468142"/>
+                  </a:lnTo>
+                  <a:lnTo>
+                    <a:pt x="4010861" y="2433934"/>
+                  </a:lnTo>
+                  <a:lnTo>
+                    <a:pt x="4082483" y="2398738"/>
+                  </a:lnTo>
+                  <a:lnTo>
+                    <a:pt x="4154106" y="2362525"/>
+                  </a:lnTo>
+                  <a:lnTo>
+                    <a:pt x="4225729" y="2325267"/>
+                  </a:lnTo>
+                  <a:lnTo>
+                    <a:pt x="4297351" y="2286933"/>
+                  </a:lnTo>
+                  <a:lnTo>
+                    <a:pt x="4368974" y="2247492"/>
+                  </a:lnTo>
+                  <a:lnTo>
+                    <a:pt x="4440596" y="2206911"/>
+                  </a:lnTo>
+                  <a:lnTo>
+                    <a:pt x="4512219" y="2165159"/>
+                  </a:lnTo>
+                  <a:lnTo>
+                    <a:pt x="4583841" y="2122201"/>
+                  </a:lnTo>
+                  <a:lnTo>
+                    <a:pt x="4655464" y="2078002"/>
+                  </a:lnTo>
+                  <a:lnTo>
+                    <a:pt x="4727086" y="2032527"/>
+                  </a:lnTo>
+                  <a:lnTo>
+                    <a:pt x="4798709" y="1985739"/>
+                  </a:lnTo>
+                  <a:lnTo>
+                    <a:pt x="4870331" y="1937599"/>
+                  </a:lnTo>
+                  <a:lnTo>
+                    <a:pt x="4941954" y="1888069"/>
+                  </a:lnTo>
+                  <a:lnTo>
+                    <a:pt x="5013576" y="1837109"/>
+                  </a:lnTo>
+                  <a:lnTo>
+                    <a:pt x="5085199" y="1784677"/>
+                  </a:lnTo>
+                  <a:lnTo>
+                    <a:pt x="5156821" y="1730731"/>
+                  </a:lnTo>
+                  <a:lnTo>
+                    <a:pt x="5228444" y="1675227"/>
+                  </a:lnTo>
+                  <a:lnTo>
+                    <a:pt x="5300066" y="1618120"/>
+                  </a:lnTo>
+                  <a:lnTo>
+                    <a:pt x="5371689" y="1559363"/>
+                  </a:lnTo>
+                  <a:lnTo>
+                    <a:pt x="5443311" y="1498910"/>
+                  </a:lnTo>
+                  <a:lnTo>
+                    <a:pt x="5514934" y="1436711"/>
+                  </a:lnTo>
+                  <a:lnTo>
+                    <a:pt x="5586557" y="1372716"/>
+                  </a:lnTo>
+                  <a:lnTo>
+                    <a:pt x="5658179" y="1306872"/>
+                  </a:lnTo>
+                  <a:lnTo>
+                    <a:pt x="5729802" y="1239127"/>
+                  </a:lnTo>
+                  <a:lnTo>
+                    <a:pt x="5801424" y="1169425"/>
+                  </a:lnTo>
+                  <a:lnTo>
+                    <a:pt x="5873047" y="1097711"/>
+                  </a:lnTo>
+                  <a:lnTo>
+                    <a:pt x="5944669" y="1023925"/>
+                  </a:lnTo>
+                  <a:lnTo>
+                    <a:pt x="6016292" y="948009"/>
+                  </a:lnTo>
+                  <a:lnTo>
+                    <a:pt x="6087914" y="869900"/>
+                  </a:lnTo>
+                  <a:lnTo>
+                    <a:pt x="6159537" y="789535"/>
+                  </a:lnTo>
+                  <a:lnTo>
+                    <a:pt x="6231159" y="706850"/>
+                  </a:lnTo>
+                  <a:lnTo>
+                    <a:pt x="6302782" y="621776"/>
+                  </a:lnTo>
+                  <a:lnTo>
+                    <a:pt x="6374404" y="534246"/>
+                  </a:lnTo>
+                  <a:lnTo>
+                    <a:pt x="6446027" y="444187"/>
+                  </a:lnTo>
+                  <a:lnTo>
+                    <a:pt x="6517649" y="351528"/>
+                  </a:lnTo>
+                  <a:lnTo>
+                    <a:pt x="6589272" y="256193"/>
+                  </a:lnTo>
+                  <a:lnTo>
+                    <a:pt x="6660894" y="158105"/>
+                  </a:lnTo>
+                  <a:lnTo>
+                    <a:pt x="6732517" y="57184"/>
+                  </a:lnTo>
+                  <a:lnTo>
+                    <a:pt x="6771961" y="0"/>
                   </a:lnTo>
                 </a:path>
               </a:pathLst>
@@ -4425,7 +4422,7 @@
           </p:nvSpPr>
           <p:spPr>
             <a:xfrm>
-              <a:off x="4374536" y="1896563"/>
+              <a:off x="4334057" y="1896563"/>
               <a:ext cx="0" cy="3826579"/>
             </a:xfrm>
             <a:custGeom>
@@ -4698,7 +4695,7 @@
           </p:nvSpPr>
           <p:spPr>
             <a:xfrm>
-              <a:off x="2009531" y="5785772"/>
+              <a:off x="2008892" y="5785772"/>
               <a:ext cx="223753" cy="80101"/>
             </a:xfrm>
             <a:prstGeom prst="rect">
@@ -4744,7 +4741,7 @@
           </p:nvSpPr>
           <p:spPr>
             <a:xfrm>
-              <a:off x="4372762" y="5785772"/>
+              <a:off x="4369739" y="5785772"/>
               <a:ext cx="62179" cy="80101"/>
             </a:xfrm>
             <a:prstGeom prst="rect">
@@ -4790,7 +4787,7 @@
           </p:nvSpPr>
           <p:spPr>
             <a:xfrm>
-              <a:off x="6593026" y="5785772"/>
+              <a:off x="6587619" y="5785772"/>
               <a:ext cx="186537" cy="80101"/>
             </a:xfrm>
             <a:prstGeom prst="rect">
